--- a/slides/6.Function/Function.pptx
+++ b/slides/6.Function/Function.pptx
@@ -8362,14 +8362,14 @@
               <a:buNone/>
             </a:pPr>
             <a:r>
-              <a:rPr lang="en" dirty="0">
+              <a:rPr lang="en" sz="2400" dirty="0">
                 <a:solidFill>
                   <a:schemeClr val="accent2"/>
                 </a:solidFill>
               </a:rPr>
               <a:t>Combination and Permutation;</a:t>
             </a:r>
-            <a:endParaRPr dirty="0">
+            <a:endParaRPr sz="2400" dirty="0">
               <a:solidFill>
                 <a:schemeClr val="accent2"/>
               </a:solidFill>
@@ -8560,7 +8560,7 @@
         <p:spPr>
           <a:xfrm>
             <a:off x="1143250" y="1572296"/>
-            <a:ext cx="5626052" cy="1020553"/>
+            <a:ext cx="5347278" cy="1020553"/>
           </a:xfrm>
           <a:prstGeom prst="rect">
             <a:avLst/>
@@ -8576,7 +8576,7 @@
           </a:bodyPr>
           <a:lstStyle/>
           <a:p>
-            <a:pPr marL="0" lvl="0" indent="0" algn="l" rtl="0">
+            <a:pPr marL="0" lvl="0" indent="0" algn="just" rtl="0">
               <a:spcBef>
                 <a:spcPts val="0"/>
               </a:spcBef>
@@ -8586,7 +8586,7 @@
               <a:buNone/>
             </a:pPr>
             <a:r>
-              <a:rPr lang="en-US" sz="2000" dirty="0">
+              <a:rPr lang="en-US" dirty="0">
                 <a:solidFill>
                   <a:schemeClr val="accent1"/>
                 </a:solidFill>
@@ -8619,7 +8619,7 @@
             </a:endParaRPr>
           </a:p>
           <a:p>
-            <a:pPr marL="0" lvl="0" indent="0" algn="l" rtl="0">
+            <a:pPr marL="0" lvl="0" indent="0" algn="just" rtl="0">
               <a:spcBef>
                 <a:spcPts val="0"/>
               </a:spcBef>
@@ -8629,7 +8629,7 @@
               <a:buNone/>
             </a:pPr>
             <a:r>
-              <a:rPr lang="en-US" sz="1600" dirty="0">
+              <a:rPr lang="en-US" dirty="0">
                 <a:solidFill>
                   <a:srgbClr val="92D050"/>
                 </a:solidFill>
@@ -8922,13 +8922,14 @@
             </a:lvl9pPr>
           </a:lstStyle>
           <a:p>
-            <a:pPr marL="285750" indent="-285750">
+            <a:pPr marL="0" indent="0">
               <a:buClr>
                 <a:srgbClr val="FF0000"/>
               </a:buClr>
+              <a:buNone/>
             </a:pPr>
             <a:r>
-              <a:rPr lang="en-US" dirty="0">
+              <a:rPr lang="en-US" sz="1200" dirty="0">
                 <a:solidFill>
                   <a:srgbClr val="FF0000"/>
                 </a:solidFill>
@@ -10008,7 +10009,7 @@
               <a:buNone/>
             </a:pPr>
             <a:r>
-              <a:rPr lang="en-US" dirty="0">
+              <a:rPr lang="en-US" sz="2400" dirty="0">
                 <a:solidFill>
                   <a:schemeClr val="accent2"/>
                 </a:solidFill>
@@ -10016,14 +10017,14 @@
               <a:t>What is function?</a:t>
             </a:r>
             <a:r>
-              <a:rPr lang="en" dirty="0">
+              <a:rPr lang="en" sz="2400" dirty="0">
                 <a:solidFill>
                   <a:schemeClr val="accent2"/>
                 </a:solidFill>
               </a:rPr>
               <a:t>;</a:t>
             </a:r>
-            <a:endParaRPr dirty="0">
+            <a:endParaRPr sz="2400" dirty="0">
               <a:solidFill>
                 <a:schemeClr val="accent2"/>
               </a:solidFill>
@@ -10214,7 +10215,7 @@
               <a:buNone/>
             </a:pPr>
             <a:r>
-              <a:rPr lang="en-US" sz="2000" dirty="0">
+              <a:rPr lang="en-US" dirty="0">
                 <a:solidFill>
                   <a:schemeClr val="accent1"/>
                 </a:solidFill>
@@ -10269,7 +10270,7 @@
               <a:buNone/>
             </a:pPr>
             <a:r>
-              <a:rPr lang="en-US" sz="2000" dirty="0">
+              <a:rPr lang="en-US" dirty="0">
                 <a:solidFill>
                   <a:schemeClr val="accent1"/>
                 </a:solidFill>
@@ -12588,7 +12589,7 @@
               <a:buNone/>
             </a:pPr>
             <a:r>
-              <a:rPr lang="en-US" dirty="0">
+              <a:rPr lang="en-US" sz="2400" dirty="0">
                 <a:solidFill>
                   <a:schemeClr val="accent2"/>
                 </a:solidFill>
@@ -12596,14 +12597,14 @@
               <a:t>Binary and Decimal formats</a:t>
             </a:r>
             <a:r>
-              <a:rPr lang="en" dirty="0">
+              <a:rPr lang="en" sz="2400" dirty="0">
                 <a:solidFill>
                   <a:schemeClr val="accent2"/>
                 </a:solidFill>
               </a:rPr>
               <a:t>;</a:t>
             </a:r>
-            <a:endParaRPr dirty="0">
+            <a:endParaRPr sz="2400" dirty="0">
               <a:solidFill>
                 <a:schemeClr val="accent2"/>
               </a:solidFill>
@@ -12794,7 +12795,7 @@
         <p:spPr>
           <a:xfrm>
             <a:off x="1060931" y="1123900"/>
-            <a:ext cx="7708495" cy="1714611"/>
+            <a:ext cx="7782280" cy="1714611"/>
           </a:xfrm>
           <a:prstGeom prst="rect">
             <a:avLst/>
@@ -12820,7 +12821,7 @@
               <a:buNone/>
             </a:pPr>
             <a:r>
-              <a:rPr lang="en-US" sz="2000" dirty="0">
+              <a:rPr lang="en-US" dirty="0">
                 <a:solidFill>
                   <a:schemeClr val="accent1"/>
                 </a:solidFill>
@@ -13334,7 +13335,7 @@
               <a:buNone/>
             </a:pPr>
             <a:r>
-              <a:rPr lang="en-US" dirty="0">
+              <a:rPr lang="en-US" sz="2400" dirty="0">
                 <a:solidFill>
                   <a:schemeClr val="accent2"/>
                 </a:solidFill>
@@ -13342,14 +13343,14 @@
               <a:t>The Fibonacci Series</a:t>
             </a:r>
             <a:r>
-              <a:rPr lang="en" dirty="0">
+              <a:rPr lang="en" sz="2400" dirty="0">
                 <a:solidFill>
                   <a:schemeClr val="accent2"/>
                 </a:solidFill>
               </a:rPr>
               <a:t>;</a:t>
             </a:r>
-            <a:endParaRPr dirty="0">
+            <a:endParaRPr sz="2400" dirty="0">
               <a:solidFill>
                 <a:schemeClr val="accent2"/>
               </a:solidFill>
@@ -13558,7 +13559,7 @@
               <a:buNone/>
             </a:pPr>
             <a:r>
-              <a:rPr lang="en-US" sz="2000" dirty="0">
+              <a:rPr lang="en-US" dirty="0">
                 <a:solidFill>
                   <a:schemeClr val="accent1"/>
                 </a:solidFill>
@@ -13643,7 +13644,7 @@
               <a:buNone/>
             </a:pPr>
             <a:r>
-              <a:rPr lang="en-US" sz="1600" dirty="0">
+              <a:rPr lang="en-US" dirty="0">
                 <a:solidFill>
                   <a:srgbClr val="92D050"/>
                 </a:solidFill>
@@ -14283,7 +14284,7 @@
         <p:spPr>
           <a:xfrm>
             <a:off x="1143250" y="1378483"/>
-            <a:ext cx="7482957" cy="1020553"/>
+            <a:ext cx="7875643" cy="1020553"/>
           </a:xfrm>
           <a:prstGeom prst="rect">
             <a:avLst/>
@@ -14309,7 +14310,7 @@
               <a:buNone/>
             </a:pPr>
             <a:r>
-              <a:rPr lang="en-US" sz="2000" dirty="0">
+              <a:rPr lang="en-US" dirty="0">
                 <a:solidFill>
                   <a:schemeClr val="accent1"/>
                 </a:solidFill>
@@ -14321,7 +14322,7 @@
               <a:t>Write a program implementing the </a:t>
             </a:r>
             <a:r>
-              <a:rPr lang="en-US" sz="2000" dirty="0">
+              <a:rPr lang="en-US" dirty="0">
                 <a:solidFill>
                   <a:srgbClr val="92D050"/>
                 </a:solidFill>
@@ -14333,7 +14334,7 @@
               <a:t>Fibonacci sequence,</a:t>
             </a:r>
             <a:r>
-              <a:rPr lang="en-US" sz="2000" dirty="0">
+              <a:rPr lang="en-US" dirty="0">
                 <a:solidFill>
                   <a:schemeClr val="accent1"/>
                 </a:solidFill>
@@ -14627,7 +14628,7 @@
           </a:lstStyle>
           <a:p>
             <a:r>
-              <a:rPr lang="en-US" dirty="0">
+              <a:rPr lang="en-US" sz="2400" dirty="0">
                 <a:solidFill>
                   <a:schemeClr val="accent2"/>
                 </a:solidFill>
@@ -15943,7 +15944,7 @@
           </a:lstStyle>
           <a:p>
             <a:r>
-              <a:rPr lang="en-US" dirty="0">
+              <a:rPr lang="en-US" sz="2400" dirty="0">
                 <a:solidFill>
                   <a:schemeClr val="accent2"/>
                 </a:solidFill>
@@ -15967,7 +15968,7 @@
         </p:nvSpPr>
         <p:spPr>
           <a:xfrm>
-            <a:off x="912942" y="1026196"/>
+            <a:off x="912942" y="925754"/>
             <a:ext cx="7585084" cy="1020553"/>
           </a:xfrm>
           <a:prstGeom prst="rect">
@@ -15993,7 +15994,7 @@
               </a:spcAft>
             </a:pPr>
             <a:r>
-              <a:rPr lang="en-US" sz="1800" dirty="0">
+              <a:rPr lang="en-US" dirty="0">
                 <a:solidFill>
                   <a:schemeClr val="accent1"/>
                 </a:solidFill>
@@ -16094,7 +16095,7 @@
               </a:spcAft>
             </a:pPr>
             <a:r>
-              <a:rPr lang="en-US" sz="1600" dirty="0">
+              <a:rPr lang="en-US" dirty="0">
                 <a:solidFill>
                   <a:srgbClr val="92D050"/>
                 </a:solidFill>
@@ -16484,14 +16485,14 @@
               <a:buNone/>
             </a:pPr>
             <a:r>
-              <a:rPr lang="en" dirty="0">
+              <a:rPr lang="en" sz="2400" dirty="0">
                 <a:solidFill>
                   <a:schemeClr val="accent2"/>
                 </a:solidFill>
               </a:rPr>
               <a:t>Combination and Permutation;</a:t>
             </a:r>
-            <a:endParaRPr dirty="0">
+            <a:endParaRPr sz="2400" dirty="0">
               <a:solidFill>
                 <a:schemeClr val="accent2"/>
               </a:solidFill>
@@ -16681,8 +16682,8 @@
         </p:nvSpPr>
         <p:spPr>
           <a:xfrm>
-            <a:off x="951018" y="1888759"/>
-            <a:ext cx="5235516" cy="1020553"/>
+            <a:off x="1244836" y="1428577"/>
+            <a:ext cx="7651391" cy="1020553"/>
           </a:xfrm>
           <a:prstGeom prst="rect">
             <a:avLst/>
@@ -16698,7 +16699,7 @@
           </a:bodyPr>
           <a:lstStyle/>
           <a:p>
-            <a:pPr marL="0" lvl="0" indent="0" algn="l" rtl="0">
+            <a:pPr marL="0" lvl="0" indent="0" algn="just" rtl="0">
               <a:spcBef>
                 <a:spcPts val="0"/>
               </a:spcBef>
@@ -16708,7 +16709,7 @@
               <a:buNone/>
             </a:pPr>
             <a:r>
-              <a:rPr lang="en-US" sz="2000" dirty="0">
+              <a:rPr lang="en-US" dirty="0">
                 <a:solidFill>
                   <a:schemeClr val="accent1"/>
                 </a:solidFill>
@@ -16741,17 +16742,9 @@
             </a:endParaRPr>
           </a:p>
           <a:p>
-            <a:pPr marL="0" lvl="0" indent="0" algn="l" rtl="0">
-              <a:spcBef>
-                <a:spcPts val="0"/>
-              </a:spcBef>
-              <a:spcAft>
-                <a:spcPts val="0"/>
-              </a:spcAft>
-              <a:buNone/>
-            </a:pPr>
+            <a:pPr lvl="0" algn="just"/>
             <a:r>
-              <a:rPr lang="en-US" sz="1800" dirty="0">
+              <a:rPr lang="en-US" dirty="0">
                 <a:solidFill>
                   <a:schemeClr val="accent1"/>
                 </a:solidFill>
@@ -16760,8 +16753,29 @@
                 <a:cs typeface="Fira Code"/>
                 <a:sym typeface="Fira Code"/>
               </a:rPr>
-              <a:t>Which is the foundation of combination and permutation.</a:t>
+              <a:t>Which is the foundation of combination and permutation.             </a:t>
             </a:r>
+            <a:r>
+              <a:rPr lang="en-US" dirty="0">
+                <a:solidFill>
+                  <a:srgbClr val="92D050"/>
+                </a:solidFill>
+                <a:latin typeface="Fira Code"/>
+                <a:ea typeface="Fira Code"/>
+                <a:cs typeface="Fira Code"/>
+                <a:sym typeface="Fira Code"/>
+              </a:rPr>
+              <a:t>(As shown in the picture!)</a:t>
+            </a:r>
+            <a:endParaRPr lang="en-US" dirty="0">
+              <a:solidFill>
+                <a:schemeClr val="accent1"/>
+              </a:solidFill>
+              <a:latin typeface="Fira Code"/>
+              <a:ea typeface="Fira Code"/>
+              <a:cs typeface="Fira Code"/>
+              <a:sym typeface="Fira Code"/>
+            </a:endParaRPr>
           </a:p>
           <a:p>
             <a:pPr marL="0" lvl="0" indent="0" algn="l" rtl="0">
@@ -16774,7 +16788,7 @@
               <a:buNone/>
             </a:pPr>
             <a:r>
-              <a:rPr lang="en-US" sz="1600" dirty="0">
+              <a:rPr lang="en-US" dirty="0">
                 <a:solidFill>
                   <a:srgbClr val="92D050"/>
                 </a:solidFill>
@@ -16783,301 +16797,11 @@
                 <a:cs typeface="Fira Code"/>
                 <a:sym typeface="Fira Code"/>
               </a:rPr>
-              <a:t> (As shown in the picture!)</a:t>
+              <a:t>     </a:t>
             </a:r>
           </a:p>
         </p:txBody>
       </p:sp>
-      <mc:AlternateContent xmlns:mc="http://schemas.openxmlformats.org/markup-compatibility/2006" xmlns:a14="http://schemas.microsoft.com/office/drawing/2010/main">
-        <mc:Choice Requires="a14">
-          <p:sp>
-            <p:nvSpPr>
-              <p:cNvPr id="2" name="TextBox 1">
-                <a:extLst>
-                  <a:ext uri="{FF2B5EF4-FFF2-40B4-BE49-F238E27FC236}">
-                    <a16:creationId xmlns:a16="http://schemas.microsoft.com/office/drawing/2014/main" id="{F81C1ACE-EA6C-285C-223E-AE2E595F2355}"/>
-                  </a:ext>
-                </a:extLst>
-              </p:cNvPr>
-              <p:cNvSpPr txBox="1"/>
-              <p:nvPr/>
-            </p:nvSpPr>
-            <p:spPr>
-              <a:xfrm>
-                <a:off x="6691962" y="2188042"/>
-                <a:ext cx="1586268" cy="441531"/>
-              </a:xfrm>
-              <a:prstGeom prst="rect">
-                <a:avLst/>
-              </a:prstGeom>
-              <a:noFill/>
-            </p:spPr>
-            <p:txBody>
-              <a:bodyPr wrap="none" lIns="0" tIns="0" rIns="0" bIns="0" rtlCol="0">
-                <a:spAutoFit/>
-              </a:bodyPr>
-              <a:lstStyle/>
-              <a:p>
-                <a:pPr/>
-                <a14:m>
-                  <m:oMathPara xmlns:m="http://schemas.openxmlformats.org/officeDocument/2006/math">
-                    <m:oMathParaPr>
-                      <m:jc m:val="centerGroup"/>
-                    </m:oMathParaPr>
-                    <m:oMath xmlns:m="http://schemas.openxmlformats.org/officeDocument/2006/math">
-                      <m:r>
-                        <a:rPr lang="en-US" b="0" i="1" smtClean="0">
-                          <a:solidFill>
-                            <a:schemeClr val="accent2">
-                              <a:lumMod val="60000"/>
-                              <a:lumOff val="40000"/>
-                            </a:schemeClr>
-                          </a:solidFill>
-                          <a:latin typeface="Cambria Math" panose="02040503050406030204" pitchFamily="18" charset="0"/>
-                        </a:rPr>
-                        <m:t>𝐶</m:t>
-                      </m:r>
-                      <m:r>
-                        <a:rPr lang="en-US" b="0" i="1" smtClean="0">
-                          <a:solidFill>
-                            <a:schemeClr val="accent2">
-                              <a:lumMod val="60000"/>
-                              <a:lumOff val="40000"/>
-                            </a:schemeClr>
-                          </a:solidFill>
-                          <a:latin typeface="Cambria Math" panose="02040503050406030204" pitchFamily="18" charset="0"/>
-                        </a:rPr>
-                        <m:t>(</m:t>
-                      </m:r>
-                      <m:r>
-                        <a:rPr lang="en-US" b="0" i="1" smtClean="0">
-                          <a:solidFill>
-                            <a:schemeClr val="accent2">
-                              <a:lumMod val="60000"/>
-                              <a:lumOff val="40000"/>
-                            </a:schemeClr>
-                          </a:solidFill>
-                          <a:latin typeface="Cambria Math" panose="02040503050406030204" pitchFamily="18" charset="0"/>
-                        </a:rPr>
-                        <m:t>𝑛</m:t>
-                      </m:r>
-                      <m:r>
-                        <a:rPr lang="en-US" b="0" i="1" smtClean="0">
-                          <a:solidFill>
-                            <a:schemeClr val="accent2">
-                              <a:lumMod val="60000"/>
-                              <a:lumOff val="40000"/>
-                            </a:schemeClr>
-                          </a:solidFill>
-                          <a:latin typeface="Cambria Math" panose="02040503050406030204" pitchFamily="18" charset="0"/>
-                        </a:rPr>
-                        <m:t>,</m:t>
-                      </m:r>
-                      <m:r>
-                        <a:rPr lang="en-US" b="0" i="1" smtClean="0">
-                          <a:solidFill>
-                            <a:schemeClr val="accent2">
-                              <a:lumMod val="60000"/>
-                              <a:lumOff val="40000"/>
-                            </a:schemeClr>
-                          </a:solidFill>
-                          <a:latin typeface="Cambria Math" panose="02040503050406030204" pitchFamily="18" charset="0"/>
-                        </a:rPr>
-                        <m:t>𝑟</m:t>
-                      </m:r>
-                      <m:r>
-                        <a:rPr lang="en-US" b="0" i="1" smtClean="0">
-                          <a:solidFill>
-                            <a:schemeClr val="accent2">
-                              <a:lumMod val="60000"/>
-                              <a:lumOff val="40000"/>
-                            </a:schemeClr>
-                          </a:solidFill>
-                          <a:latin typeface="Cambria Math" panose="02040503050406030204" pitchFamily="18" charset="0"/>
-                        </a:rPr>
-                        <m:t>)=</m:t>
-                      </m:r>
-                      <m:f>
-                        <m:fPr>
-                          <m:ctrlPr>
-                            <a:rPr lang="en-US" b="0" i="1" smtClean="0">
-                              <a:solidFill>
-                                <a:schemeClr val="accent2">
-                                  <a:lumMod val="60000"/>
-                                  <a:lumOff val="40000"/>
-                                </a:schemeClr>
-                              </a:solidFill>
-                              <a:latin typeface="Cambria Math" panose="02040503050406030204" pitchFamily="18" charset="0"/>
-                            </a:rPr>
-                          </m:ctrlPr>
-                        </m:fPr>
-                        <m:num>
-                          <m:r>
-                            <a:rPr lang="en-US" b="0" i="1" smtClean="0">
-                              <a:solidFill>
-                                <a:schemeClr val="accent2">
-                                  <a:lumMod val="60000"/>
-                                  <a:lumOff val="40000"/>
-                                </a:schemeClr>
-                              </a:solidFill>
-                              <a:latin typeface="Cambria Math" panose="02040503050406030204" pitchFamily="18" charset="0"/>
-                            </a:rPr>
-                            <m:t>𝑛</m:t>
-                          </m:r>
-                          <m:r>
-                            <a:rPr lang="en-US" b="0" i="1" smtClean="0">
-                              <a:solidFill>
-                                <a:schemeClr val="accent2">
-                                  <a:lumMod val="60000"/>
-                                  <a:lumOff val="40000"/>
-                                </a:schemeClr>
-                              </a:solidFill>
-                              <a:latin typeface="Cambria Math" panose="02040503050406030204" pitchFamily="18" charset="0"/>
-                              <a:ea typeface="Cambria Math" panose="02040503050406030204" pitchFamily="18" charset="0"/>
-                            </a:rPr>
-                            <m:t>!</m:t>
-                          </m:r>
-                        </m:num>
-                        <m:den>
-                          <m:r>
-                            <a:rPr lang="en-US" b="0" i="1" smtClean="0">
-                              <a:solidFill>
-                                <a:schemeClr val="accent2">
-                                  <a:lumMod val="60000"/>
-                                  <a:lumOff val="40000"/>
-                                </a:schemeClr>
-                              </a:solidFill>
-                              <a:latin typeface="Cambria Math" panose="02040503050406030204" pitchFamily="18" charset="0"/>
-                            </a:rPr>
-                            <m:t>𝑟</m:t>
-                          </m:r>
-                          <m:r>
-                            <a:rPr lang="en-US" b="0" i="1" smtClean="0">
-                              <a:solidFill>
-                                <a:schemeClr val="accent2">
-                                  <a:lumMod val="60000"/>
-                                  <a:lumOff val="40000"/>
-                                </a:schemeClr>
-                              </a:solidFill>
-                              <a:latin typeface="Cambria Math" panose="02040503050406030204" pitchFamily="18" charset="0"/>
-                              <a:ea typeface="Cambria Math" panose="02040503050406030204" pitchFamily="18" charset="0"/>
-                            </a:rPr>
-                            <m:t>!(</m:t>
-                          </m:r>
-                          <m:r>
-                            <a:rPr lang="en-US" b="0" i="1" smtClean="0">
-                              <a:solidFill>
-                                <a:schemeClr val="accent2">
-                                  <a:lumMod val="60000"/>
-                                  <a:lumOff val="40000"/>
-                                </a:schemeClr>
-                              </a:solidFill>
-                              <a:latin typeface="Cambria Math" panose="02040503050406030204" pitchFamily="18" charset="0"/>
-                              <a:ea typeface="Cambria Math" panose="02040503050406030204" pitchFamily="18" charset="0"/>
-                            </a:rPr>
-                            <m:t>𝑛</m:t>
-                          </m:r>
-                          <m:r>
-                            <a:rPr lang="en-US" b="0" i="1" smtClean="0">
-                              <a:solidFill>
-                                <a:schemeClr val="accent2">
-                                  <a:lumMod val="60000"/>
-                                  <a:lumOff val="40000"/>
-                                </a:schemeClr>
-                              </a:solidFill>
-                              <a:latin typeface="Cambria Math" panose="02040503050406030204" pitchFamily="18" charset="0"/>
-                              <a:ea typeface="Cambria Math" panose="02040503050406030204" pitchFamily="18" charset="0"/>
-                            </a:rPr>
-                            <m:t>−</m:t>
-                          </m:r>
-                          <m:r>
-                            <a:rPr lang="en-US" b="0" i="1" smtClean="0">
-                              <a:solidFill>
-                                <a:schemeClr val="accent2">
-                                  <a:lumMod val="60000"/>
-                                  <a:lumOff val="40000"/>
-                                </a:schemeClr>
-                              </a:solidFill>
-                              <a:latin typeface="Cambria Math" panose="02040503050406030204" pitchFamily="18" charset="0"/>
-                              <a:ea typeface="Cambria Math" panose="02040503050406030204" pitchFamily="18" charset="0"/>
-                            </a:rPr>
-                            <m:t>𝑟</m:t>
-                          </m:r>
-                          <m:r>
-                            <a:rPr lang="en-US" b="0" i="1" smtClean="0">
-                              <a:solidFill>
-                                <a:schemeClr val="accent2">
-                                  <a:lumMod val="60000"/>
-                                  <a:lumOff val="40000"/>
-                                </a:schemeClr>
-                              </a:solidFill>
-                              <a:latin typeface="Cambria Math" panose="02040503050406030204" pitchFamily="18" charset="0"/>
-                              <a:ea typeface="Cambria Math" panose="02040503050406030204" pitchFamily="18" charset="0"/>
-                            </a:rPr>
-                            <m:t>)!</m:t>
-                          </m:r>
-                        </m:den>
-                      </m:f>
-                    </m:oMath>
-                  </m:oMathPara>
-                </a14:m>
-                <a:endParaRPr lang="en-US" dirty="0">
-                  <a:solidFill>
-                    <a:schemeClr val="accent2">
-                      <a:lumMod val="60000"/>
-                      <a:lumOff val="40000"/>
-                    </a:schemeClr>
-                  </a:solidFill>
-                </a:endParaRPr>
-              </a:p>
-            </p:txBody>
-          </p:sp>
-        </mc:Choice>
-        <mc:Fallback xmlns="">
-          <p:sp>
-            <p:nvSpPr>
-              <p:cNvPr id="2" name="TextBox 1">
-                <a:extLst>
-                  <a:ext uri="{FF2B5EF4-FFF2-40B4-BE49-F238E27FC236}">
-                    <a16:creationId xmlns:a16="http://schemas.microsoft.com/office/drawing/2014/main" id="{F81C1ACE-EA6C-285C-223E-AE2E595F2355}"/>
-                  </a:ext>
-                </a:extLst>
-              </p:cNvPr>
-              <p:cNvSpPr txBox="1">
-                <a:spLocks noRot="1" noChangeAspect="1" noMove="1" noResize="1" noEditPoints="1" noAdjustHandles="1" noChangeArrowheads="1" noChangeShapeType="1" noTextEdit="1"/>
-              </p:cNvSpPr>
-              <p:nvPr/>
-            </p:nvSpPr>
-            <p:spPr>
-              <a:xfrm>
-                <a:off x="6691962" y="2188042"/>
-                <a:ext cx="1586268" cy="441531"/>
-              </a:xfrm>
-              <a:prstGeom prst="rect">
-                <a:avLst/>
-              </a:prstGeom>
-              <a:blipFill>
-                <a:blip r:embed="rId3"/>
-                <a:stretch>
-                  <a:fillRect l="-1923" r="-1923" b="-16667"/>
-                </a:stretch>
-              </a:blipFill>
-            </p:spPr>
-            <p:txBody>
-              <a:bodyPr/>
-              <a:lstStyle/>
-              <a:p>
-                <a:r>
-                  <a:rPr lang="en-US">
-                    <a:noFill/>
-                  </a:rPr>
-                  <a:t> </a:t>
-                </a:r>
-              </a:p>
-            </p:txBody>
-          </p:sp>
-        </mc:Fallback>
-      </mc:AlternateContent>
       <mc:AlternateContent xmlns:mc="http://schemas.openxmlformats.org/markup-compatibility/2006" xmlns:a14="http://schemas.microsoft.com/office/drawing/2010/main">
         <mc:Choice Requires="a14">
           <p:sp>
@@ -17358,10 +17082,587 @@
       </mc:AlternateContent>
       <p:sp>
         <p:nvSpPr>
-          <p:cNvPr id="5" name="Rectangle 4">
+          <p:cNvPr id="6" name="Google Shape;473;p28">
             <a:extLst>
               <a:ext uri="{FF2B5EF4-FFF2-40B4-BE49-F238E27FC236}">
-                <a16:creationId xmlns:a16="http://schemas.microsoft.com/office/drawing/2014/main" id="{01529BE2-77AD-2C31-F94F-23E4A79A51F4}"/>
+                <a16:creationId xmlns:a16="http://schemas.microsoft.com/office/drawing/2014/main" id="{02235CF0-6541-95E3-2888-292BC07BCE0E}"/>
+              </a:ext>
+            </a:extLst>
+          </p:cNvPr>
+          <p:cNvSpPr txBox="1">
+            <a:spLocks/>
+          </p:cNvSpPr>
+          <p:nvPr/>
+        </p:nvSpPr>
+        <p:spPr>
+          <a:xfrm>
+            <a:off x="8433851" y="4694675"/>
+            <a:ext cx="319124" cy="357300"/>
+          </a:xfrm>
+          <a:prstGeom prst="rect">
+            <a:avLst/>
+          </a:prstGeom>
+          <a:noFill/>
+          <a:ln>
+            <a:noFill/>
+          </a:ln>
+        </p:spPr>
+        <p:txBody>
+          <a:bodyPr spcFirstLastPara="1" wrap="square" lIns="91425" tIns="91425" rIns="91425" bIns="91425" anchor="ctr" anchorCtr="0">
+            <a:noAutofit/>
+          </a:bodyPr>
+          <a:lstStyle>
+            <a:defPPr marR="0" lvl="0" algn="l" rtl="0">
+              <a:lnSpc>
+                <a:spcPct val="100000"/>
+              </a:lnSpc>
+              <a:spcBef>
+                <a:spcPts val="0"/>
+              </a:spcBef>
+              <a:spcAft>
+                <a:spcPts val="0"/>
+              </a:spcAft>
+            </a:defPPr>
+            <a:lvl1pPr marL="457200" marR="0" lvl="0" indent="-317500" algn="l" rtl="0">
+              <a:lnSpc>
+                <a:spcPct val="100000"/>
+              </a:lnSpc>
+              <a:spcBef>
+                <a:spcPts val="0"/>
+              </a:spcBef>
+              <a:spcAft>
+                <a:spcPts val="0"/>
+              </a:spcAft>
+              <a:buClr>
+                <a:schemeClr val="dk2"/>
+              </a:buClr>
+              <a:buSzPts val="1400"/>
+              <a:buFont typeface="Fira Code"/>
+              <a:buChar char="●"/>
+              <a:defRPr sz="1400" b="0" i="0" u="none" strike="noStrike" cap="none">
+                <a:solidFill>
+                  <a:schemeClr val="dk2"/>
+                </a:solidFill>
+                <a:latin typeface="Fira Code"/>
+                <a:ea typeface="Fira Code"/>
+                <a:cs typeface="Fira Code"/>
+                <a:sym typeface="Fira Code"/>
+              </a:defRPr>
+            </a:lvl1pPr>
+            <a:lvl2pPr marL="914400" marR="0" lvl="1" indent="-317500" algn="l" rtl="0">
+              <a:lnSpc>
+                <a:spcPct val="100000"/>
+              </a:lnSpc>
+              <a:spcBef>
+                <a:spcPts val="0"/>
+              </a:spcBef>
+              <a:spcAft>
+                <a:spcPts val="0"/>
+              </a:spcAft>
+              <a:buClr>
+                <a:schemeClr val="dk2"/>
+              </a:buClr>
+              <a:buSzPts val="1400"/>
+              <a:buFont typeface="Fira Code"/>
+              <a:buChar char="○"/>
+              <a:defRPr sz="1400" b="0" i="0" u="none" strike="noStrike" cap="none">
+                <a:solidFill>
+                  <a:schemeClr val="dk2"/>
+                </a:solidFill>
+                <a:latin typeface="Fira Code"/>
+                <a:ea typeface="Fira Code"/>
+                <a:cs typeface="Fira Code"/>
+                <a:sym typeface="Fira Code"/>
+              </a:defRPr>
+            </a:lvl2pPr>
+            <a:lvl3pPr marL="1371600" marR="0" lvl="2" indent="-317500" algn="l" rtl="0">
+              <a:lnSpc>
+                <a:spcPct val="100000"/>
+              </a:lnSpc>
+              <a:spcBef>
+                <a:spcPts val="0"/>
+              </a:spcBef>
+              <a:spcAft>
+                <a:spcPts val="0"/>
+              </a:spcAft>
+              <a:buClr>
+                <a:schemeClr val="dk2"/>
+              </a:buClr>
+              <a:buSzPts val="1400"/>
+              <a:buFont typeface="Fira Code"/>
+              <a:buChar char="■"/>
+              <a:defRPr sz="1400" b="0" i="0" u="none" strike="noStrike" cap="none">
+                <a:solidFill>
+                  <a:schemeClr val="dk2"/>
+                </a:solidFill>
+                <a:latin typeface="Fira Code"/>
+                <a:ea typeface="Fira Code"/>
+                <a:cs typeface="Fira Code"/>
+                <a:sym typeface="Fira Code"/>
+              </a:defRPr>
+            </a:lvl3pPr>
+            <a:lvl4pPr marL="1828800" marR="0" lvl="3" indent="-317500" algn="l" rtl="0">
+              <a:lnSpc>
+                <a:spcPct val="100000"/>
+              </a:lnSpc>
+              <a:spcBef>
+                <a:spcPts val="0"/>
+              </a:spcBef>
+              <a:spcAft>
+                <a:spcPts val="0"/>
+              </a:spcAft>
+              <a:buClr>
+                <a:schemeClr val="dk2"/>
+              </a:buClr>
+              <a:buSzPts val="1400"/>
+              <a:buFont typeface="Fira Code"/>
+              <a:buChar char="●"/>
+              <a:defRPr sz="1400" b="0" i="0" u="none" strike="noStrike" cap="none">
+                <a:solidFill>
+                  <a:schemeClr val="dk2"/>
+                </a:solidFill>
+                <a:latin typeface="Fira Code"/>
+                <a:ea typeface="Fira Code"/>
+                <a:cs typeface="Fira Code"/>
+                <a:sym typeface="Fira Code"/>
+              </a:defRPr>
+            </a:lvl4pPr>
+            <a:lvl5pPr marL="2286000" marR="0" lvl="4" indent="-317500" algn="l" rtl="0">
+              <a:lnSpc>
+                <a:spcPct val="100000"/>
+              </a:lnSpc>
+              <a:spcBef>
+                <a:spcPts val="0"/>
+              </a:spcBef>
+              <a:spcAft>
+                <a:spcPts val="0"/>
+              </a:spcAft>
+              <a:buClr>
+                <a:schemeClr val="dk2"/>
+              </a:buClr>
+              <a:buSzPts val="1400"/>
+              <a:buFont typeface="Fira Code"/>
+              <a:buChar char="○"/>
+              <a:defRPr sz="1400" b="0" i="0" u="none" strike="noStrike" cap="none">
+                <a:solidFill>
+                  <a:schemeClr val="dk2"/>
+                </a:solidFill>
+                <a:latin typeface="Fira Code"/>
+                <a:ea typeface="Fira Code"/>
+                <a:cs typeface="Fira Code"/>
+                <a:sym typeface="Fira Code"/>
+              </a:defRPr>
+            </a:lvl5pPr>
+            <a:lvl6pPr marL="2743200" marR="0" lvl="5" indent="-317500" algn="l" rtl="0">
+              <a:lnSpc>
+                <a:spcPct val="100000"/>
+              </a:lnSpc>
+              <a:spcBef>
+                <a:spcPts val="0"/>
+              </a:spcBef>
+              <a:spcAft>
+                <a:spcPts val="0"/>
+              </a:spcAft>
+              <a:buClr>
+                <a:schemeClr val="dk2"/>
+              </a:buClr>
+              <a:buSzPts val="1400"/>
+              <a:buFont typeface="Fira Code"/>
+              <a:buChar char="■"/>
+              <a:defRPr sz="1400" b="0" i="0" u="none" strike="noStrike" cap="none">
+                <a:solidFill>
+                  <a:schemeClr val="dk2"/>
+                </a:solidFill>
+                <a:latin typeface="Fira Code"/>
+                <a:ea typeface="Fira Code"/>
+                <a:cs typeface="Fira Code"/>
+                <a:sym typeface="Fira Code"/>
+              </a:defRPr>
+            </a:lvl6pPr>
+            <a:lvl7pPr marL="3200400" marR="0" lvl="6" indent="-317500" algn="l" rtl="0">
+              <a:lnSpc>
+                <a:spcPct val="100000"/>
+              </a:lnSpc>
+              <a:spcBef>
+                <a:spcPts val="0"/>
+              </a:spcBef>
+              <a:spcAft>
+                <a:spcPts val="0"/>
+              </a:spcAft>
+              <a:buClr>
+                <a:schemeClr val="dk2"/>
+              </a:buClr>
+              <a:buSzPts val="1400"/>
+              <a:buFont typeface="Fira Code"/>
+              <a:buChar char="●"/>
+              <a:defRPr sz="1400" b="0" i="0" u="none" strike="noStrike" cap="none">
+                <a:solidFill>
+                  <a:schemeClr val="dk2"/>
+                </a:solidFill>
+                <a:latin typeface="Fira Code"/>
+                <a:ea typeface="Fira Code"/>
+                <a:cs typeface="Fira Code"/>
+                <a:sym typeface="Fira Code"/>
+              </a:defRPr>
+            </a:lvl7pPr>
+            <a:lvl8pPr marL="3657600" marR="0" lvl="7" indent="-317500" algn="l" rtl="0">
+              <a:lnSpc>
+                <a:spcPct val="100000"/>
+              </a:lnSpc>
+              <a:spcBef>
+                <a:spcPts val="0"/>
+              </a:spcBef>
+              <a:spcAft>
+                <a:spcPts val="0"/>
+              </a:spcAft>
+              <a:buClr>
+                <a:schemeClr val="dk2"/>
+              </a:buClr>
+              <a:buSzPts val="1400"/>
+              <a:buFont typeface="Fira Code"/>
+              <a:buChar char="○"/>
+              <a:defRPr sz="1400" b="0" i="0" u="none" strike="noStrike" cap="none">
+                <a:solidFill>
+                  <a:schemeClr val="dk2"/>
+                </a:solidFill>
+                <a:latin typeface="Fira Code"/>
+                <a:ea typeface="Fira Code"/>
+                <a:cs typeface="Fira Code"/>
+                <a:sym typeface="Fira Code"/>
+              </a:defRPr>
+            </a:lvl8pPr>
+            <a:lvl9pPr marL="4114800" marR="0" lvl="8" indent="-317500" algn="l" rtl="0">
+              <a:lnSpc>
+                <a:spcPct val="100000"/>
+              </a:lnSpc>
+              <a:spcBef>
+                <a:spcPts val="0"/>
+              </a:spcBef>
+              <a:spcAft>
+                <a:spcPts val="0"/>
+              </a:spcAft>
+              <a:buClr>
+                <a:schemeClr val="dk2"/>
+              </a:buClr>
+              <a:buSzPts val="1400"/>
+              <a:buFont typeface="Fira Code"/>
+              <a:buChar char="■"/>
+              <a:defRPr sz="1400" b="0" i="0" u="none" strike="noStrike" cap="none">
+                <a:solidFill>
+                  <a:schemeClr val="dk2"/>
+                </a:solidFill>
+                <a:latin typeface="Fira Code"/>
+                <a:ea typeface="Fira Code"/>
+                <a:cs typeface="Fira Code"/>
+                <a:sym typeface="Fira Code"/>
+              </a:defRPr>
+            </a:lvl9pPr>
+          </a:lstStyle>
+          <a:p>
+            <a:pPr marL="0" indent="0">
+              <a:buFont typeface="Fira Code"/>
+              <a:buNone/>
+            </a:pPr>
+            <a:r>
+              <a:rPr lang="en" sz="1100" dirty="0">
+                <a:solidFill>
+                  <a:schemeClr val="accent3"/>
+                </a:solidFill>
+              </a:rPr>
+              <a:t>7</a:t>
+            </a:r>
+            <a:endParaRPr lang="en" dirty="0">
+              <a:solidFill>
+                <a:schemeClr val="accent3"/>
+              </a:solidFill>
+            </a:endParaRPr>
+          </a:p>
+        </p:txBody>
+      </p:sp>
+      <mc:AlternateContent xmlns:mc="http://schemas.openxmlformats.org/markup-compatibility/2006">
+        <mc:Choice xmlns:a14="http://schemas.microsoft.com/office/drawing/2010/main" Requires="a14">
+          <p:sp>
+            <p:nvSpPr>
+              <p:cNvPr id="8" name="TextBox 7">
+                <a:extLst>
+                  <a:ext uri="{FF2B5EF4-FFF2-40B4-BE49-F238E27FC236}">
+                    <a16:creationId xmlns:a16="http://schemas.microsoft.com/office/drawing/2014/main" id="{E42C37BA-9679-1C05-7126-27512DA9B192}"/>
+                  </a:ext>
+                </a:extLst>
+              </p:cNvPr>
+              <p:cNvSpPr txBox="1"/>
+              <p:nvPr/>
+            </p:nvSpPr>
+            <p:spPr>
+              <a:xfrm>
+                <a:off x="6777210" y="3538192"/>
+                <a:ext cx="1415772" cy="441531"/>
+              </a:xfrm>
+              <a:prstGeom prst="rect">
+                <a:avLst/>
+              </a:prstGeom>
+              <a:noFill/>
+            </p:spPr>
+            <p:txBody>
+              <a:bodyPr wrap="none" lIns="0" tIns="0" rIns="0" bIns="0" rtlCol="0">
+                <a:spAutoFit/>
+              </a:bodyPr>
+              <a:lstStyle/>
+              <a:p>
+                <a:pPr/>
+                <a14:m>
+                  <m:oMathPara xmlns:m="http://schemas.openxmlformats.org/officeDocument/2006/math">
+                    <m:oMathParaPr>
+                      <m:jc m:val="centerGroup"/>
+                    </m:oMathParaPr>
+                    <m:oMath xmlns:m="http://schemas.openxmlformats.org/officeDocument/2006/math">
+                      <m:r>
+                        <a:rPr lang="en-US" b="0" i="1" smtClean="0">
+                          <a:solidFill>
+                            <a:schemeClr val="accent2">
+                              <a:lumMod val="60000"/>
+                              <a:lumOff val="40000"/>
+                            </a:schemeClr>
+                          </a:solidFill>
+                          <a:latin typeface="Cambria Math" panose="02040503050406030204" pitchFamily="18" charset="0"/>
+                        </a:rPr>
+                        <m:t>𝑃</m:t>
+                      </m:r>
+                      <m:r>
+                        <a:rPr lang="en-US" b="0" i="1" smtClean="0">
+                          <a:solidFill>
+                            <a:schemeClr val="accent2">
+                              <a:lumMod val="60000"/>
+                              <a:lumOff val="40000"/>
+                            </a:schemeClr>
+                          </a:solidFill>
+                          <a:latin typeface="Cambria Math" panose="02040503050406030204" pitchFamily="18" charset="0"/>
+                        </a:rPr>
+                        <m:t>(</m:t>
+                      </m:r>
+                      <m:r>
+                        <a:rPr lang="en-US" b="0" i="1" smtClean="0">
+                          <a:solidFill>
+                            <a:schemeClr val="accent2">
+                              <a:lumMod val="60000"/>
+                              <a:lumOff val="40000"/>
+                            </a:schemeClr>
+                          </a:solidFill>
+                          <a:latin typeface="Cambria Math" panose="02040503050406030204" pitchFamily="18" charset="0"/>
+                        </a:rPr>
+                        <m:t>𝑛</m:t>
+                      </m:r>
+                      <m:r>
+                        <a:rPr lang="en-US" b="0" i="1" smtClean="0">
+                          <a:solidFill>
+                            <a:schemeClr val="accent2">
+                              <a:lumMod val="60000"/>
+                              <a:lumOff val="40000"/>
+                            </a:schemeClr>
+                          </a:solidFill>
+                          <a:latin typeface="Cambria Math" panose="02040503050406030204" pitchFamily="18" charset="0"/>
+                        </a:rPr>
+                        <m:t>,</m:t>
+                      </m:r>
+                      <m:r>
+                        <a:rPr lang="en-US" b="0" i="1" smtClean="0">
+                          <a:solidFill>
+                            <a:schemeClr val="accent2">
+                              <a:lumMod val="60000"/>
+                              <a:lumOff val="40000"/>
+                            </a:schemeClr>
+                          </a:solidFill>
+                          <a:latin typeface="Cambria Math" panose="02040503050406030204" pitchFamily="18" charset="0"/>
+                        </a:rPr>
+                        <m:t>𝑟</m:t>
+                      </m:r>
+                      <m:r>
+                        <a:rPr lang="en-US" b="0" i="1" smtClean="0">
+                          <a:solidFill>
+                            <a:schemeClr val="accent2">
+                              <a:lumMod val="60000"/>
+                              <a:lumOff val="40000"/>
+                            </a:schemeClr>
+                          </a:solidFill>
+                          <a:latin typeface="Cambria Math" panose="02040503050406030204" pitchFamily="18" charset="0"/>
+                        </a:rPr>
+                        <m:t>)=</m:t>
+                      </m:r>
+                      <m:f>
+                        <m:fPr>
+                          <m:ctrlPr>
+                            <a:rPr lang="en-US" b="0" i="1" smtClean="0">
+                              <a:solidFill>
+                                <a:schemeClr val="accent2">
+                                  <a:lumMod val="60000"/>
+                                  <a:lumOff val="40000"/>
+                                </a:schemeClr>
+                              </a:solidFill>
+                              <a:latin typeface="Cambria Math" panose="02040503050406030204" pitchFamily="18" charset="0"/>
+                            </a:rPr>
+                          </m:ctrlPr>
+                        </m:fPr>
+                        <m:num>
+                          <m:r>
+                            <a:rPr lang="en-US" b="0" i="1" smtClean="0">
+                              <a:solidFill>
+                                <a:schemeClr val="accent2">
+                                  <a:lumMod val="60000"/>
+                                  <a:lumOff val="40000"/>
+                                </a:schemeClr>
+                              </a:solidFill>
+                              <a:latin typeface="Cambria Math" panose="02040503050406030204" pitchFamily="18" charset="0"/>
+                            </a:rPr>
+                            <m:t>𝑛</m:t>
+                          </m:r>
+                          <m:r>
+                            <a:rPr lang="en-US" b="0" i="1" smtClean="0">
+                              <a:solidFill>
+                                <a:schemeClr val="accent2">
+                                  <a:lumMod val="60000"/>
+                                  <a:lumOff val="40000"/>
+                                </a:schemeClr>
+                              </a:solidFill>
+                              <a:latin typeface="Cambria Math" panose="02040503050406030204" pitchFamily="18" charset="0"/>
+                              <a:ea typeface="Cambria Math" panose="02040503050406030204" pitchFamily="18" charset="0"/>
+                            </a:rPr>
+                            <m:t>!</m:t>
+                          </m:r>
+                        </m:num>
+                        <m:den>
+                          <m:r>
+                            <a:rPr lang="en-US" b="0" i="1" smtClean="0">
+                              <a:solidFill>
+                                <a:schemeClr val="accent2">
+                                  <a:lumMod val="60000"/>
+                                  <a:lumOff val="40000"/>
+                                </a:schemeClr>
+                              </a:solidFill>
+                              <a:latin typeface="Cambria Math" panose="02040503050406030204" pitchFamily="18" charset="0"/>
+                              <a:ea typeface="Cambria Math" panose="02040503050406030204" pitchFamily="18" charset="0"/>
+                            </a:rPr>
+                            <m:t>(</m:t>
+                          </m:r>
+                          <m:r>
+                            <a:rPr lang="en-US" b="0" i="1" smtClean="0">
+                              <a:solidFill>
+                                <a:schemeClr val="accent2">
+                                  <a:lumMod val="60000"/>
+                                  <a:lumOff val="40000"/>
+                                </a:schemeClr>
+                              </a:solidFill>
+                              <a:latin typeface="Cambria Math" panose="02040503050406030204" pitchFamily="18" charset="0"/>
+                              <a:ea typeface="Cambria Math" panose="02040503050406030204" pitchFamily="18" charset="0"/>
+                            </a:rPr>
+                            <m:t>𝑛</m:t>
+                          </m:r>
+                          <m:r>
+                            <a:rPr lang="en-US" b="0" i="1" smtClean="0">
+                              <a:solidFill>
+                                <a:schemeClr val="accent2">
+                                  <a:lumMod val="60000"/>
+                                  <a:lumOff val="40000"/>
+                                </a:schemeClr>
+                              </a:solidFill>
+                              <a:latin typeface="Cambria Math" panose="02040503050406030204" pitchFamily="18" charset="0"/>
+                              <a:ea typeface="Cambria Math" panose="02040503050406030204" pitchFamily="18" charset="0"/>
+                            </a:rPr>
+                            <m:t>−</m:t>
+                          </m:r>
+                          <m:r>
+                            <a:rPr lang="en-US" b="0" i="1" smtClean="0">
+                              <a:solidFill>
+                                <a:schemeClr val="accent2">
+                                  <a:lumMod val="60000"/>
+                                  <a:lumOff val="40000"/>
+                                </a:schemeClr>
+                              </a:solidFill>
+                              <a:latin typeface="Cambria Math" panose="02040503050406030204" pitchFamily="18" charset="0"/>
+                              <a:ea typeface="Cambria Math" panose="02040503050406030204" pitchFamily="18" charset="0"/>
+                            </a:rPr>
+                            <m:t>𝑟</m:t>
+                          </m:r>
+                          <m:r>
+                            <a:rPr lang="en-US" b="0" i="1" smtClean="0">
+                              <a:solidFill>
+                                <a:schemeClr val="accent2">
+                                  <a:lumMod val="60000"/>
+                                  <a:lumOff val="40000"/>
+                                </a:schemeClr>
+                              </a:solidFill>
+                              <a:latin typeface="Cambria Math" panose="02040503050406030204" pitchFamily="18" charset="0"/>
+                              <a:ea typeface="Cambria Math" panose="02040503050406030204" pitchFamily="18" charset="0"/>
+                            </a:rPr>
+                            <m:t>)!</m:t>
+                          </m:r>
+                        </m:den>
+                      </m:f>
+                    </m:oMath>
+                  </m:oMathPara>
+                </a14:m>
+                <a:endParaRPr lang="en-US" dirty="0">
+                  <a:solidFill>
+                    <a:schemeClr val="accent2">
+                      <a:lumMod val="60000"/>
+                      <a:lumOff val="40000"/>
+                    </a:schemeClr>
+                  </a:solidFill>
+                </a:endParaRPr>
+              </a:p>
+            </p:txBody>
+          </p:sp>
+        </mc:Choice>
+        <mc:Fallback>
+          <p:sp>
+            <p:nvSpPr>
+              <p:cNvPr id="8" name="TextBox 7">
+                <a:extLst>
+                  <a:ext uri="{FF2B5EF4-FFF2-40B4-BE49-F238E27FC236}">
+                    <a16:creationId xmlns:a16="http://schemas.microsoft.com/office/drawing/2014/main" id="{E42C37BA-9679-1C05-7126-27512DA9B192}"/>
+                  </a:ext>
+                </a:extLst>
+              </p:cNvPr>
+              <p:cNvSpPr txBox="1">
+                <a:spLocks noRot="1" noChangeAspect="1" noMove="1" noResize="1" noEditPoints="1" noAdjustHandles="1" noChangeArrowheads="1" noChangeShapeType="1" noTextEdit="1"/>
+              </p:cNvSpPr>
+              <p:nvPr/>
+            </p:nvSpPr>
+            <p:spPr>
+              <a:xfrm>
+                <a:off x="6777210" y="3538192"/>
+                <a:ext cx="1415772" cy="441531"/>
+              </a:xfrm>
+              <a:prstGeom prst="rect">
+                <a:avLst/>
+              </a:prstGeom>
+              <a:blipFill>
+                <a:blip r:embed="rId5"/>
+                <a:stretch>
+                  <a:fillRect l="-2155" r="-2155" b="-16438"/>
+                </a:stretch>
+              </a:blipFill>
+            </p:spPr>
+            <p:txBody>
+              <a:bodyPr/>
+              <a:lstStyle/>
+              <a:p>
+                <a:r>
+                  <a:rPr lang="en-US">
+                    <a:noFill/>
+                  </a:rPr>
+                  <a:t> </a:t>
+                </a:r>
+              </a:p>
+            </p:txBody>
+          </p:sp>
+        </mc:Fallback>
+      </mc:AlternateContent>
+      <p:sp>
+        <p:nvSpPr>
+          <p:cNvPr id="9" name="Rectangle 8">
+            <a:extLst>
+              <a:ext uri="{FF2B5EF4-FFF2-40B4-BE49-F238E27FC236}">
+                <a16:creationId xmlns:a16="http://schemas.microsoft.com/office/drawing/2014/main" id="{4FD56EB8-9BA4-4915-D2D1-93C4AF68941A}"/>
               </a:ext>
             </a:extLst>
           </p:cNvPr>
@@ -17370,7 +17671,7 @@
         </p:nvSpPr>
         <p:spPr>
           <a:xfrm>
-            <a:off x="6462743" y="2019295"/>
+            <a:off x="6462743" y="2694370"/>
             <a:ext cx="2160893" cy="1579311"/>
           </a:xfrm>
           <a:prstGeom prst="rect">
@@ -17407,305 +17708,6 @@
           <a:p>
             <a:pPr algn="ctr"/>
             <a:endParaRPr lang="en-US"/>
-          </a:p>
-        </p:txBody>
-      </p:sp>
-      <p:sp>
-        <p:nvSpPr>
-          <p:cNvPr id="6" name="Google Shape;473;p28">
-            <a:extLst>
-              <a:ext uri="{FF2B5EF4-FFF2-40B4-BE49-F238E27FC236}">
-                <a16:creationId xmlns:a16="http://schemas.microsoft.com/office/drawing/2014/main" id="{02235CF0-6541-95E3-2888-292BC07BCE0E}"/>
-              </a:ext>
-            </a:extLst>
-          </p:cNvPr>
-          <p:cNvSpPr txBox="1">
-            <a:spLocks/>
-          </p:cNvSpPr>
-          <p:nvPr/>
-        </p:nvSpPr>
-        <p:spPr>
-          <a:xfrm>
-            <a:off x="8433851" y="4694675"/>
-            <a:ext cx="319124" cy="357300"/>
-          </a:xfrm>
-          <a:prstGeom prst="rect">
-            <a:avLst/>
-          </a:prstGeom>
-          <a:noFill/>
-          <a:ln>
-            <a:noFill/>
-          </a:ln>
-        </p:spPr>
-        <p:txBody>
-          <a:bodyPr spcFirstLastPara="1" wrap="square" lIns="91425" tIns="91425" rIns="91425" bIns="91425" anchor="ctr" anchorCtr="0">
-            <a:noAutofit/>
-          </a:bodyPr>
-          <a:lstStyle>
-            <a:defPPr marR="0" lvl="0" algn="l" rtl="0">
-              <a:lnSpc>
-                <a:spcPct val="100000"/>
-              </a:lnSpc>
-              <a:spcBef>
-                <a:spcPts val="0"/>
-              </a:spcBef>
-              <a:spcAft>
-                <a:spcPts val="0"/>
-              </a:spcAft>
-            </a:defPPr>
-            <a:lvl1pPr marL="457200" marR="0" lvl="0" indent="-317500" algn="l" rtl="0">
-              <a:lnSpc>
-                <a:spcPct val="100000"/>
-              </a:lnSpc>
-              <a:spcBef>
-                <a:spcPts val="0"/>
-              </a:spcBef>
-              <a:spcAft>
-                <a:spcPts val="0"/>
-              </a:spcAft>
-              <a:buClr>
-                <a:schemeClr val="dk2"/>
-              </a:buClr>
-              <a:buSzPts val="1400"/>
-              <a:buFont typeface="Fira Code"/>
-              <a:buChar char="●"/>
-              <a:defRPr sz="1400" b="0" i="0" u="none" strike="noStrike" cap="none">
-                <a:solidFill>
-                  <a:schemeClr val="dk2"/>
-                </a:solidFill>
-                <a:latin typeface="Fira Code"/>
-                <a:ea typeface="Fira Code"/>
-                <a:cs typeface="Fira Code"/>
-                <a:sym typeface="Fira Code"/>
-              </a:defRPr>
-            </a:lvl1pPr>
-            <a:lvl2pPr marL="914400" marR="0" lvl="1" indent="-317500" algn="l" rtl="0">
-              <a:lnSpc>
-                <a:spcPct val="100000"/>
-              </a:lnSpc>
-              <a:spcBef>
-                <a:spcPts val="0"/>
-              </a:spcBef>
-              <a:spcAft>
-                <a:spcPts val="0"/>
-              </a:spcAft>
-              <a:buClr>
-                <a:schemeClr val="dk2"/>
-              </a:buClr>
-              <a:buSzPts val="1400"/>
-              <a:buFont typeface="Fira Code"/>
-              <a:buChar char="○"/>
-              <a:defRPr sz="1400" b="0" i="0" u="none" strike="noStrike" cap="none">
-                <a:solidFill>
-                  <a:schemeClr val="dk2"/>
-                </a:solidFill>
-                <a:latin typeface="Fira Code"/>
-                <a:ea typeface="Fira Code"/>
-                <a:cs typeface="Fira Code"/>
-                <a:sym typeface="Fira Code"/>
-              </a:defRPr>
-            </a:lvl2pPr>
-            <a:lvl3pPr marL="1371600" marR="0" lvl="2" indent="-317500" algn="l" rtl="0">
-              <a:lnSpc>
-                <a:spcPct val="100000"/>
-              </a:lnSpc>
-              <a:spcBef>
-                <a:spcPts val="0"/>
-              </a:spcBef>
-              <a:spcAft>
-                <a:spcPts val="0"/>
-              </a:spcAft>
-              <a:buClr>
-                <a:schemeClr val="dk2"/>
-              </a:buClr>
-              <a:buSzPts val="1400"/>
-              <a:buFont typeface="Fira Code"/>
-              <a:buChar char="■"/>
-              <a:defRPr sz="1400" b="0" i="0" u="none" strike="noStrike" cap="none">
-                <a:solidFill>
-                  <a:schemeClr val="dk2"/>
-                </a:solidFill>
-                <a:latin typeface="Fira Code"/>
-                <a:ea typeface="Fira Code"/>
-                <a:cs typeface="Fira Code"/>
-                <a:sym typeface="Fira Code"/>
-              </a:defRPr>
-            </a:lvl3pPr>
-            <a:lvl4pPr marL="1828800" marR="0" lvl="3" indent="-317500" algn="l" rtl="0">
-              <a:lnSpc>
-                <a:spcPct val="100000"/>
-              </a:lnSpc>
-              <a:spcBef>
-                <a:spcPts val="0"/>
-              </a:spcBef>
-              <a:spcAft>
-                <a:spcPts val="0"/>
-              </a:spcAft>
-              <a:buClr>
-                <a:schemeClr val="dk2"/>
-              </a:buClr>
-              <a:buSzPts val="1400"/>
-              <a:buFont typeface="Fira Code"/>
-              <a:buChar char="●"/>
-              <a:defRPr sz="1400" b="0" i="0" u="none" strike="noStrike" cap="none">
-                <a:solidFill>
-                  <a:schemeClr val="dk2"/>
-                </a:solidFill>
-                <a:latin typeface="Fira Code"/>
-                <a:ea typeface="Fira Code"/>
-                <a:cs typeface="Fira Code"/>
-                <a:sym typeface="Fira Code"/>
-              </a:defRPr>
-            </a:lvl4pPr>
-            <a:lvl5pPr marL="2286000" marR="0" lvl="4" indent="-317500" algn="l" rtl="0">
-              <a:lnSpc>
-                <a:spcPct val="100000"/>
-              </a:lnSpc>
-              <a:spcBef>
-                <a:spcPts val="0"/>
-              </a:spcBef>
-              <a:spcAft>
-                <a:spcPts val="0"/>
-              </a:spcAft>
-              <a:buClr>
-                <a:schemeClr val="dk2"/>
-              </a:buClr>
-              <a:buSzPts val="1400"/>
-              <a:buFont typeface="Fira Code"/>
-              <a:buChar char="○"/>
-              <a:defRPr sz="1400" b="0" i="0" u="none" strike="noStrike" cap="none">
-                <a:solidFill>
-                  <a:schemeClr val="dk2"/>
-                </a:solidFill>
-                <a:latin typeface="Fira Code"/>
-                <a:ea typeface="Fira Code"/>
-                <a:cs typeface="Fira Code"/>
-                <a:sym typeface="Fira Code"/>
-              </a:defRPr>
-            </a:lvl5pPr>
-            <a:lvl6pPr marL="2743200" marR="0" lvl="5" indent="-317500" algn="l" rtl="0">
-              <a:lnSpc>
-                <a:spcPct val="100000"/>
-              </a:lnSpc>
-              <a:spcBef>
-                <a:spcPts val="0"/>
-              </a:spcBef>
-              <a:spcAft>
-                <a:spcPts val="0"/>
-              </a:spcAft>
-              <a:buClr>
-                <a:schemeClr val="dk2"/>
-              </a:buClr>
-              <a:buSzPts val="1400"/>
-              <a:buFont typeface="Fira Code"/>
-              <a:buChar char="■"/>
-              <a:defRPr sz="1400" b="0" i="0" u="none" strike="noStrike" cap="none">
-                <a:solidFill>
-                  <a:schemeClr val="dk2"/>
-                </a:solidFill>
-                <a:latin typeface="Fira Code"/>
-                <a:ea typeface="Fira Code"/>
-                <a:cs typeface="Fira Code"/>
-                <a:sym typeface="Fira Code"/>
-              </a:defRPr>
-            </a:lvl6pPr>
-            <a:lvl7pPr marL="3200400" marR="0" lvl="6" indent="-317500" algn="l" rtl="0">
-              <a:lnSpc>
-                <a:spcPct val="100000"/>
-              </a:lnSpc>
-              <a:spcBef>
-                <a:spcPts val="0"/>
-              </a:spcBef>
-              <a:spcAft>
-                <a:spcPts val="0"/>
-              </a:spcAft>
-              <a:buClr>
-                <a:schemeClr val="dk2"/>
-              </a:buClr>
-              <a:buSzPts val="1400"/>
-              <a:buFont typeface="Fira Code"/>
-              <a:buChar char="●"/>
-              <a:defRPr sz="1400" b="0" i="0" u="none" strike="noStrike" cap="none">
-                <a:solidFill>
-                  <a:schemeClr val="dk2"/>
-                </a:solidFill>
-                <a:latin typeface="Fira Code"/>
-                <a:ea typeface="Fira Code"/>
-                <a:cs typeface="Fira Code"/>
-                <a:sym typeface="Fira Code"/>
-              </a:defRPr>
-            </a:lvl7pPr>
-            <a:lvl8pPr marL="3657600" marR="0" lvl="7" indent="-317500" algn="l" rtl="0">
-              <a:lnSpc>
-                <a:spcPct val="100000"/>
-              </a:lnSpc>
-              <a:spcBef>
-                <a:spcPts val="0"/>
-              </a:spcBef>
-              <a:spcAft>
-                <a:spcPts val="0"/>
-              </a:spcAft>
-              <a:buClr>
-                <a:schemeClr val="dk2"/>
-              </a:buClr>
-              <a:buSzPts val="1400"/>
-              <a:buFont typeface="Fira Code"/>
-              <a:buChar char="○"/>
-              <a:defRPr sz="1400" b="0" i="0" u="none" strike="noStrike" cap="none">
-                <a:solidFill>
-                  <a:schemeClr val="dk2"/>
-                </a:solidFill>
-                <a:latin typeface="Fira Code"/>
-                <a:ea typeface="Fira Code"/>
-                <a:cs typeface="Fira Code"/>
-                <a:sym typeface="Fira Code"/>
-              </a:defRPr>
-            </a:lvl8pPr>
-            <a:lvl9pPr marL="4114800" marR="0" lvl="8" indent="-317500" algn="l" rtl="0">
-              <a:lnSpc>
-                <a:spcPct val="100000"/>
-              </a:lnSpc>
-              <a:spcBef>
-                <a:spcPts val="0"/>
-              </a:spcBef>
-              <a:spcAft>
-                <a:spcPts val="0"/>
-              </a:spcAft>
-              <a:buClr>
-                <a:schemeClr val="dk2"/>
-              </a:buClr>
-              <a:buSzPts val="1400"/>
-              <a:buFont typeface="Fira Code"/>
-              <a:buChar char="■"/>
-              <a:defRPr sz="1400" b="0" i="0" u="none" strike="noStrike" cap="none">
-                <a:solidFill>
-                  <a:schemeClr val="dk2"/>
-                </a:solidFill>
-                <a:latin typeface="Fira Code"/>
-                <a:ea typeface="Fira Code"/>
-                <a:cs typeface="Fira Code"/>
-                <a:sym typeface="Fira Code"/>
-              </a:defRPr>
-            </a:lvl9pPr>
-          </a:lstStyle>
-          <a:p>
-            <a:pPr marL="0" indent="0">
-              <a:buFont typeface="Fira Code"/>
-              <a:buNone/>
-            </a:pPr>
-            <a:r>
-              <a:rPr lang="en" sz="1100" dirty="0">
-                <a:solidFill>
-                  <a:schemeClr val="accent3"/>
-                </a:solidFill>
-              </a:rPr>
-              <a:t>7</a:t>
-            </a:r>
-            <a:endParaRPr lang="en" dirty="0">
-              <a:solidFill>
-                <a:schemeClr val="accent3"/>
-              </a:solidFill>
-            </a:endParaRPr>
           </a:p>
         </p:txBody>
       </p:sp>

--- a/slides/6.Function/Function.pptx
+++ b/slides/6.Function/Function.pptx
@@ -5,7 +5,7 @@
     <p:sldMasterId id="2147483672" r:id="rId1"/>
   </p:sldMasterIdLst>
   <p:notesMasterIdLst>
-    <p:notesMasterId r:id="rId12"/>
+    <p:notesMasterId r:id="rId14"/>
   </p:notesMasterIdLst>
   <p:sldIdLst>
     <p:sldId id="256" r:id="rId2"/>
@@ -18,18 +18,20 @@
     <p:sldId id="312" r:id="rId9"/>
     <p:sldId id="305" r:id="rId10"/>
     <p:sldId id="313" r:id="rId11"/>
+    <p:sldId id="314" r:id="rId12"/>
+    <p:sldId id="316" r:id="rId13"/>
   </p:sldIdLst>
   <p:sldSz cx="9144000" cy="5143500" type="screen16x9"/>
   <p:notesSz cx="6858000" cy="9144000"/>
   <p:embeddedFontLst>
     <p:embeddedFont>
       <p:font typeface="Cambria Math" panose="02040503050406030204" pitchFamily="18" charset="0"/>
-      <p:regular r:id="rId13"/>
+      <p:regular r:id="rId15"/>
     </p:embeddedFont>
     <p:embeddedFont>
       <p:font typeface="Fira Code" panose="020B0809050000020004" pitchFamily="49" charset="0"/>
-      <p:regular r:id="rId14"/>
-      <p:bold r:id="rId15"/>
+      <p:regular r:id="rId16"/>
+      <p:bold r:id="rId17"/>
     </p:embeddedFont>
   </p:embeddedFontLst>
   <p:defaultTextStyle>
@@ -9864,6 +9866,2854 @@
     <p:extLst>
       <p:ext uri="{BB962C8B-B14F-4D97-AF65-F5344CB8AC3E}">
         <p14:creationId xmlns:p14="http://schemas.microsoft.com/office/powerpoint/2010/main" val="824880502"/>
+      </p:ext>
+    </p:extLst>
+  </p:cSld>
+  <p:clrMapOvr>
+    <a:masterClrMapping/>
+  </p:clrMapOvr>
+</p:sld>
+</file>
+
+<file path=ppt/slides/slide11.xml><?xml version="1.0" encoding="utf-8"?>
+<p:sld xmlns:a="http://schemas.openxmlformats.org/drawingml/2006/main" xmlns:r="http://schemas.openxmlformats.org/officeDocument/2006/relationships" xmlns:p="http://schemas.openxmlformats.org/presentationml/2006/main">
+  <p:cSld>
+    <p:spTree>
+      <p:nvGrpSpPr>
+        <p:cNvPr id="1" name=""/>
+        <p:cNvGrpSpPr/>
+        <p:nvPr/>
+      </p:nvGrpSpPr>
+      <p:grpSpPr>
+        <a:xfrm>
+          <a:off x="0" y="0"/>
+          <a:ext cx="0" cy="0"/>
+          <a:chOff x="0" y="0"/>
+          <a:chExt cx="0" cy="0"/>
+        </a:xfrm>
+      </p:grpSpPr>
+      <p:sp>
+        <p:nvSpPr>
+          <p:cNvPr id="2" name="Title 1">
+            <a:extLst>
+              <a:ext uri="{FF2B5EF4-FFF2-40B4-BE49-F238E27FC236}">
+                <a16:creationId xmlns:a16="http://schemas.microsoft.com/office/drawing/2014/main" id="{53C0293F-8CBC-0A8A-0069-B8BAA092E177}"/>
+              </a:ext>
+            </a:extLst>
+          </p:cNvPr>
+          <p:cNvSpPr>
+            <a:spLocks noGrp="1"/>
+          </p:cNvSpPr>
+          <p:nvPr>
+            <p:ph type="title"/>
+          </p:nvPr>
+        </p:nvSpPr>
+        <p:spPr>
+          <a:xfrm>
+            <a:off x="1143250" y="582700"/>
+            <a:ext cx="7290600" cy="473285"/>
+          </a:xfrm>
+        </p:spPr>
+        <p:txBody>
+          <a:bodyPr/>
+          <a:lstStyle/>
+          <a:p>
+            <a:r>
+              <a:rPr lang="en-US" sz="2400" dirty="0">
+                <a:solidFill>
+                  <a:schemeClr val="accent2"/>
+                </a:solidFill>
+              </a:rPr>
+              <a:t>Home Work</a:t>
+            </a:r>
+          </a:p>
+        </p:txBody>
+      </p:sp>
+      <p:sp>
+        <p:nvSpPr>
+          <p:cNvPr id="6" name="TextBox 5">
+            <a:extLst>
+              <a:ext uri="{FF2B5EF4-FFF2-40B4-BE49-F238E27FC236}">
+                <a16:creationId xmlns:a16="http://schemas.microsoft.com/office/drawing/2014/main" id="{1DD8263E-E3A7-243F-FD76-792602698A73}"/>
+              </a:ext>
+            </a:extLst>
+          </p:cNvPr>
+          <p:cNvSpPr txBox="1"/>
+          <p:nvPr/>
+        </p:nvSpPr>
+        <p:spPr>
+          <a:xfrm>
+            <a:off x="1143250" y="1206608"/>
+            <a:ext cx="7693984" cy="3539430"/>
+          </a:xfrm>
+          <a:prstGeom prst="rect">
+            <a:avLst/>
+          </a:prstGeom>
+          <a:noFill/>
+        </p:spPr>
+        <p:txBody>
+          <a:bodyPr wrap="square">
+            <a:spAutoFit/>
+          </a:bodyPr>
+          <a:lstStyle/>
+          <a:p>
+            <a:pPr marL="0" marR="0" lvl="0" indent="0" algn="just" defTabSz="914400" rtl="0" eaLnBrk="0" fontAlgn="base" latinLnBrk="0" hangingPunct="0">
+              <a:lnSpc>
+                <a:spcPct val="100000"/>
+              </a:lnSpc>
+              <a:spcBef>
+                <a:spcPct val="0"/>
+              </a:spcBef>
+              <a:spcAft>
+                <a:spcPct val="0"/>
+              </a:spcAft>
+              <a:buClrTx/>
+              <a:buSzTx/>
+              <a:buFontTx/>
+              <a:buNone/>
+              <a:tabLst/>
+            </a:pPr>
+            <a:r>
+              <a:rPr lang="en-US" altLang="en-US" dirty="0">
+                <a:solidFill>
+                  <a:schemeClr val="accent1"/>
+                </a:solidFill>
+                <a:latin typeface="Fira Code"/>
+                <a:ea typeface="Fira Code"/>
+                <a:cs typeface="Fira Code"/>
+              </a:rPr>
+              <a:t>Write a C program that takes a positive integer number from the user and recursively analyzes its digits to determine:</a:t>
+            </a:r>
+            <a:endParaRPr lang="fa-IR" altLang="en-US" dirty="0">
+              <a:solidFill>
+                <a:schemeClr val="accent1"/>
+              </a:solidFill>
+              <a:latin typeface="Fira Code"/>
+              <a:ea typeface="Fira Code"/>
+              <a:cs typeface="Fira Code"/>
+            </a:endParaRPr>
+          </a:p>
+          <a:p>
+            <a:pPr marL="0" marR="0" lvl="0" indent="0" algn="just" defTabSz="914400" rtl="0" eaLnBrk="0" fontAlgn="base" latinLnBrk="0" hangingPunct="0">
+              <a:lnSpc>
+                <a:spcPct val="100000"/>
+              </a:lnSpc>
+              <a:spcBef>
+                <a:spcPct val="0"/>
+              </a:spcBef>
+              <a:spcAft>
+                <a:spcPct val="0"/>
+              </a:spcAft>
+              <a:buClrTx/>
+              <a:buSzTx/>
+              <a:buFontTx/>
+              <a:buNone/>
+              <a:tabLst/>
+            </a:pPr>
+            <a:endParaRPr lang="en-US" altLang="en-US" dirty="0">
+              <a:solidFill>
+                <a:schemeClr val="accent1"/>
+              </a:solidFill>
+              <a:latin typeface="Fira Code"/>
+              <a:ea typeface="Fira Code"/>
+              <a:cs typeface="Fira Code"/>
+            </a:endParaRPr>
+          </a:p>
+          <a:p>
+            <a:pPr marL="0" marR="0" lvl="0" indent="0" algn="just" defTabSz="914400" rtl="0" eaLnBrk="0" fontAlgn="base" latinLnBrk="0" hangingPunct="0">
+              <a:lnSpc>
+                <a:spcPct val="100000"/>
+              </a:lnSpc>
+              <a:spcBef>
+                <a:spcPct val="0"/>
+              </a:spcBef>
+              <a:spcAft>
+                <a:spcPct val="0"/>
+              </a:spcAft>
+              <a:buClrTx/>
+              <a:buSzTx/>
+              <a:buFontTx/>
+              <a:buAutoNum type="arabicPeriod"/>
+              <a:tabLst/>
+            </a:pPr>
+            <a:r>
+              <a:rPr lang="en-US" altLang="en-US" dirty="0">
+                <a:solidFill>
+                  <a:schemeClr val="accent1"/>
+                </a:solidFill>
+                <a:latin typeface="Fira Code"/>
+                <a:ea typeface="Fira Code"/>
+                <a:cs typeface="Fira Code"/>
+              </a:rPr>
+              <a:t>The sum of its digits.</a:t>
+            </a:r>
+          </a:p>
+          <a:p>
+            <a:pPr marL="0" marR="0" lvl="0" indent="0" algn="just" defTabSz="914400" rtl="0" eaLnBrk="0" fontAlgn="base" latinLnBrk="0" hangingPunct="0">
+              <a:lnSpc>
+                <a:spcPct val="100000"/>
+              </a:lnSpc>
+              <a:spcBef>
+                <a:spcPct val="0"/>
+              </a:spcBef>
+              <a:spcAft>
+                <a:spcPct val="0"/>
+              </a:spcAft>
+              <a:buClrTx/>
+              <a:buSzTx/>
+              <a:buFontTx/>
+              <a:buAutoNum type="arabicPeriod" startAt="2"/>
+              <a:tabLst/>
+            </a:pPr>
+            <a:r>
+              <a:rPr lang="en-US" altLang="en-US" dirty="0">
+                <a:solidFill>
+                  <a:schemeClr val="accent1"/>
+                </a:solidFill>
+                <a:latin typeface="Fira Code"/>
+                <a:ea typeface="Fira Code"/>
+                <a:cs typeface="Fira Code"/>
+              </a:rPr>
+              <a:t>The product of its digits.</a:t>
+            </a:r>
+          </a:p>
+          <a:p>
+            <a:pPr marL="0" marR="0" lvl="0" indent="0" algn="just" defTabSz="914400" rtl="0" eaLnBrk="0" fontAlgn="base" latinLnBrk="0" hangingPunct="0">
+              <a:lnSpc>
+                <a:spcPct val="100000"/>
+              </a:lnSpc>
+              <a:spcBef>
+                <a:spcPct val="0"/>
+              </a:spcBef>
+              <a:spcAft>
+                <a:spcPct val="0"/>
+              </a:spcAft>
+              <a:buClrTx/>
+              <a:buSzTx/>
+              <a:buFontTx/>
+              <a:buAutoNum type="arabicPeriod" startAt="3"/>
+              <a:tabLst/>
+            </a:pPr>
+            <a:r>
+              <a:rPr lang="en-US" altLang="en-US" dirty="0">
+                <a:solidFill>
+                  <a:schemeClr val="accent1"/>
+                </a:solidFill>
+                <a:latin typeface="Fira Code"/>
+                <a:ea typeface="Fira Code"/>
+                <a:cs typeface="Fira Code"/>
+              </a:rPr>
+              <a:t>Whether all digits are even or not.</a:t>
+            </a:r>
+            <a:endParaRPr lang="fa-IR" altLang="en-US" dirty="0">
+              <a:solidFill>
+                <a:schemeClr val="accent1"/>
+              </a:solidFill>
+              <a:latin typeface="Fira Code"/>
+              <a:ea typeface="Fira Code"/>
+              <a:cs typeface="Fira Code"/>
+            </a:endParaRPr>
+          </a:p>
+          <a:p>
+            <a:pPr marL="0" marR="0" lvl="0" indent="0" algn="just" defTabSz="914400" rtl="0" eaLnBrk="0" fontAlgn="base" latinLnBrk="0" hangingPunct="0">
+              <a:lnSpc>
+                <a:spcPct val="100000"/>
+              </a:lnSpc>
+              <a:spcBef>
+                <a:spcPct val="0"/>
+              </a:spcBef>
+              <a:spcAft>
+                <a:spcPct val="0"/>
+              </a:spcAft>
+              <a:buClrTx/>
+              <a:buSzTx/>
+              <a:buFontTx/>
+              <a:buAutoNum type="arabicPeriod" startAt="3"/>
+              <a:tabLst/>
+            </a:pPr>
+            <a:endParaRPr lang="en-US" altLang="en-US" dirty="0">
+              <a:solidFill>
+                <a:schemeClr val="accent1"/>
+              </a:solidFill>
+              <a:latin typeface="Fira Code"/>
+              <a:ea typeface="Fira Code"/>
+              <a:cs typeface="Fira Code"/>
+            </a:endParaRPr>
+          </a:p>
+          <a:p>
+            <a:pPr marL="0" marR="0" lvl="0" indent="0" algn="just" defTabSz="914400" rtl="0" eaLnBrk="0" fontAlgn="base" latinLnBrk="0" hangingPunct="0">
+              <a:lnSpc>
+                <a:spcPct val="100000"/>
+              </a:lnSpc>
+              <a:spcBef>
+                <a:spcPct val="0"/>
+              </a:spcBef>
+              <a:spcAft>
+                <a:spcPct val="0"/>
+              </a:spcAft>
+              <a:buClrTx/>
+              <a:buSzTx/>
+              <a:buFontTx/>
+              <a:buNone/>
+              <a:tabLst/>
+            </a:pPr>
+            <a:r>
+              <a:rPr lang="en-US" altLang="en-US" dirty="0">
+                <a:solidFill>
+                  <a:schemeClr val="accent1"/>
+                </a:solidFill>
+                <a:latin typeface="Fira Code"/>
+                <a:ea typeface="Fira Code"/>
+                <a:cs typeface="Fira Code"/>
+              </a:rPr>
+              <a:t>You must implement at least three separate functions:</a:t>
+            </a:r>
+            <a:endParaRPr lang="fa-IR" altLang="en-US" dirty="0">
+              <a:solidFill>
+                <a:schemeClr val="accent1"/>
+              </a:solidFill>
+              <a:latin typeface="Fira Code"/>
+              <a:ea typeface="Fira Code"/>
+              <a:cs typeface="Fira Code"/>
+            </a:endParaRPr>
+          </a:p>
+          <a:p>
+            <a:pPr marL="0" marR="0" lvl="0" indent="0" algn="just" defTabSz="914400" rtl="0" eaLnBrk="0" fontAlgn="base" latinLnBrk="0" hangingPunct="0">
+              <a:lnSpc>
+                <a:spcPct val="100000"/>
+              </a:lnSpc>
+              <a:spcBef>
+                <a:spcPct val="0"/>
+              </a:spcBef>
+              <a:spcAft>
+                <a:spcPct val="0"/>
+              </a:spcAft>
+              <a:buClrTx/>
+              <a:buSzTx/>
+              <a:buFontTx/>
+              <a:buNone/>
+              <a:tabLst/>
+            </a:pPr>
+            <a:endParaRPr lang="en-US" altLang="en-US" dirty="0">
+              <a:solidFill>
+                <a:schemeClr val="accent1"/>
+              </a:solidFill>
+              <a:latin typeface="Fira Code"/>
+              <a:ea typeface="Fira Code"/>
+              <a:cs typeface="Fira Code"/>
+            </a:endParaRPr>
+          </a:p>
+          <a:p>
+            <a:pPr marL="0" marR="0" lvl="0" indent="0" algn="just" defTabSz="914400" rtl="0" eaLnBrk="0" fontAlgn="base" latinLnBrk="0" hangingPunct="0">
+              <a:lnSpc>
+                <a:spcPct val="150000"/>
+              </a:lnSpc>
+              <a:spcBef>
+                <a:spcPct val="0"/>
+              </a:spcBef>
+              <a:spcAft>
+                <a:spcPct val="0"/>
+              </a:spcAft>
+              <a:buClrTx/>
+              <a:buSzTx/>
+              <a:buFontTx/>
+              <a:buChar char="•"/>
+              <a:tabLst/>
+            </a:pPr>
+            <a:r>
+              <a:rPr lang="en-US" altLang="en-US" dirty="0">
+                <a:solidFill>
+                  <a:schemeClr val="accent1"/>
+                </a:solidFill>
+                <a:latin typeface="Fira Code"/>
+                <a:ea typeface="Fira Code"/>
+                <a:cs typeface="Fira Code"/>
+              </a:rPr>
+              <a:t>int </a:t>
+            </a:r>
+            <a:r>
+              <a:rPr lang="en-US" altLang="en-US" b="1" dirty="0" err="1">
+                <a:solidFill>
+                  <a:schemeClr val="accent1"/>
+                </a:solidFill>
+                <a:latin typeface="Fira Code"/>
+                <a:ea typeface="Fira Code"/>
+                <a:cs typeface="Fira Code"/>
+              </a:rPr>
+              <a:t>digitSum</a:t>
+            </a:r>
+            <a:r>
+              <a:rPr lang="en-US" altLang="en-US" b="1" dirty="0">
+                <a:solidFill>
+                  <a:schemeClr val="accent1"/>
+                </a:solidFill>
+                <a:latin typeface="Fira Code"/>
+                <a:ea typeface="Fira Code"/>
+                <a:cs typeface="Fira Code"/>
+              </a:rPr>
+              <a:t>(int n);</a:t>
+            </a:r>
+            <a:r>
+              <a:rPr lang="en-US" altLang="en-US" dirty="0">
+                <a:solidFill>
+                  <a:schemeClr val="accent1"/>
+                </a:solidFill>
+                <a:latin typeface="Fira Code"/>
+                <a:ea typeface="Fira Code"/>
+                <a:cs typeface="Fira Code"/>
+              </a:rPr>
+              <a:t> – returns the sum of the digits.</a:t>
+            </a:r>
+          </a:p>
+          <a:p>
+            <a:pPr marL="0" marR="0" lvl="0" indent="0" algn="just" defTabSz="914400" rtl="0" eaLnBrk="0" fontAlgn="base" latinLnBrk="0" hangingPunct="0">
+              <a:lnSpc>
+                <a:spcPct val="150000"/>
+              </a:lnSpc>
+              <a:spcBef>
+                <a:spcPct val="0"/>
+              </a:spcBef>
+              <a:spcAft>
+                <a:spcPct val="0"/>
+              </a:spcAft>
+              <a:buClrTx/>
+              <a:buSzTx/>
+              <a:buFontTx/>
+              <a:buChar char="•"/>
+              <a:tabLst/>
+            </a:pPr>
+            <a:r>
+              <a:rPr lang="en-US" altLang="en-US" dirty="0">
+                <a:solidFill>
+                  <a:schemeClr val="accent1"/>
+                </a:solidFill>
+                <a:latin typeface="Fira Code"/>
+                <a:ea typeface="Fira Code"/>
+                <a:cs typeface="Fira Code"/>
+              </a:rPr>
+              <a:t>int </a:t>
+            </a:r>
+            <a:r>
+              <a:rPr lang="en-US" altLang="en-US" b="1" dirty="0" err="1">
+                <a:solidFill>
+                  <a:schemeClr val="accent1"/>
+                </a:solidFill>
+                <a:latin typeface="Fira Code"/>
+                <a:ea typeface="Fira Code"/>
+                <a:cs typeface="Fira Code"/>
+              </a:rPr>
+              <a:t>digitProduct</a:t>
+            </a:r>
+            <a:r>
+              <a:rPr lang="en-US" altLang="en-US" b="1" dirty="0">
+                <a:solidFill>
+                  <a:schemeClr val="accent1"/>
+                </a:solidFill>
+                <a:latin typeface="Fira Code"/>
+                <a:ea typeface="Fira Code"/>
+                <a:cs typeface="Fira Code"/>
+              </a:rPr>
+              <a:t>(int n); </a:t>
+            </a:r>
+            <a:r>
+              <a:rPr lang="en-US" altLang="en-US" dirty="0">
+                <a:solidFill>
+                  <a:schemeClr val="accent1"/>
+                </a:solidFill>
+                <a:latin typeface="Fira Code"/>
+                <a:ea typeface="Fira Code"/>
+                <a:cs typeface="Fira Code"/>
+              </a:rPr>
+              <a:t>– returns the product of the digits.</a:t>
+            </a:r>
+          </a:p>
+          <a:p>
+            <a:pPr marL="0" marR="0" lvl="0" indent="0" algn="just" defTabSz="914400" rtl="0" eaLnBrk="0" fontAlgn="base" latinLnBrk="0" hangingPunct="0">
+              <a:lnSpc>
+                <a:spcPct val="150000"/>
+              </a:lnSpc>
+              <a:spcBef>
+                <a:spcPct val="0"/>
+              </a:spcBef>
+              <a:spcAft>
+                <a:spcPct val="0"/>
+              </a:spcAft>
+              <a:buClrTx/>
+              <a:buSzTx/>
+              <a:buFontTx/>
+              <a:buChar char="•"/>
+              <a:tabLst/>
+            </a:pPr>
+            <a:r>
+              <a:rPr lang="en-US" altLang="en-US" dirty="0">
+                <a:solidFill>
+                  <a:schemeClr val="accent1"/>
+                </a:solidFill>
+                <a:latin typeface="Fira Code"/>
+                <a:ea typeface="Fira Code"/>
+                <a:cs typeface="Fira Code"/>
+              </a:rPr>
+              <a:t>int </a:t>
+            </a:r>
+            <a:r>
+              <a:rPr lang="en-US" altLang="en-US" b="1" dirty="0" err="1">
+                <a:solidFill>
+                  <a:schemeClr val="accent1"/>
+                </a:solidFill>
+                <a:latin typeface="Fira Code"/>
+                <a:ea typeface="Fira Code"/>
+                <a:cs typeface="Fira Code"/>
+              </a:rPr>
+              <a:t>allEvenDigits</a:t>
+            </a:r>
+            <a:r>
+              <a:rPr lang="en-US" altLang="en-US" b="1" dirty="0">
+                <a:solidFill>
+                  <a:schemeClr val="accent1"/>
+                </a:solidFill>
+                <a:latin typeface="Fira Code"/>
+                <a:ea typeface="Fira Code"/>
+                <a:cs typeface="Fira Code"/>
+              </a:rPr>
+              <a:t>(int n); </a:t>
+            </a:r>
+            <a:r>
+              <a:rPr lang="en-US" altLang="en-US" dirty="0">
+                <a:solidFill>
+                  <a:schemeClr val="accent1"/>
+                </a:solidFill>
+                <a:latin typeface="Fira Code"/>
+                <a:ea typeface="Fira Code"/>
+                <a:cs typeface="Fira Code"/>
+              </a:rPr>
+              <a:t>– returns 1 if all digits are even, otherwise 0.</a:t>
+            </a:r>
+          </a:p>
+          <a:p>
+            <a:pPr marL="0" marR="0" lvl="0" indent="0" algn="l" defTabSz="914400" rtl="0" eaLnBrk="0" fontAlgn="base" latinLnBrk="0" hangingPunct="0">
+              <a:lnSpc>
+                <a:spcPct val="100000"/>
+              </a:lnSpc>
+              <a:spcBef>
+                <a:spcPct val="0"/>
+              </a:spcBef>
+              <a:spcAft>
+                <a:spcPct val="0"/>
+              </a:spcAft>
+              <a:buClrTx/>
+              <a:buSzTx/>
+              <a:buFontTx/>
+              <a:buNone/>
+              <a:tabLst/>
+            </a:pPr>
+            <a:endParaRPr kumimoji="0" lang="en-US" altLang="en-US" sz="1400" b="0" i="0" u="none" strike="noStrike" cap="none" normalizeH="0" baseline="0" dirty="0">
+              <a:ln>
+                <a:noFill/>
+              </a:ln>
+              <a:solidFill>
+                <a:schemeClr val="accent1"/>
+              </a:solidFill>
+              <a:effectLst/>
+              <a:latin typeface="Arial" panose="020B0604020202020204" pitchFamily="34" charset="0"/>
+            </a:endParaRPr>
+          </a:p>
+        </p:txBody>
+      </p:sp>
+      <p:sp>
+        <p:nvSpPr>
+          <p:cNvPr id="7" name="Google Shape;475;p28">
+            <a:extLst>
+              <a:ext uri="{FF2B5EF4-FFF2-40B4-BE49-F238E27FC236}">
+                <a16:creationId xmlns:a16="http://schemas.microsoft.com/office/drawing/2014/main" id="{756D1156-FD39-0F47-D7F3-DD5C3A6CAD17}"/>
+              </a:ext>
+            </a:extLst>
+          </p:cNvPr>
+          <p:cNvSpPr txBox="1">
+            <a:spLocks/>
+          </p:cNvSpPr>
+          <p:nvPr/>
+        </p:nvSpPr>
+        <p:spPr>
+          <a:xfrm>
+            <a:off x="4572000" y="91525"/>
+            <a:ext cx="4572000" cy="357300"/>
+          </a:xfrm>
+          <a:prstGeom prst="rect">
+            <a:avLst/>
+          </a:prstGeom>
+          <a:noFill/>
+          <a:ln>
+            <a:noFill/>
+          </a:ln>
+        </p:spPr>
+        <p:txBody>
+          <a:bodyPr spcFirstLastPara="1" wrap="square" lIns="91425" tIns="91425" rIns="91425" bIns="91425" anchor="ctr" anchorCtr="0">
+            <a:noAutofit/>
+          </a:bodyPr>
+          <a:lstStyle>
+            <a:defPPr marR="0" lvl="0" algn="l" rtl="0">
+              <a:lnSpc>
+                <a:spcPct val="100000"/>
+              </a:lnSpc>
+              <a:spcBef>
+                <a:spcPts val="0"/>
+              </a:spcBef>
+              <a:spcAft>
+                <a:spcPts val="0"/>
+              </a:spcAft>
+            </a:defPPr>
+            <a:lvl1pPr marL="457200" marR="0" lvl="0" indent="-317500" algn="l" rtl="0">
+              <a:lnSpc>
+                <a:spcPct val="100000"/>
+              </a:lnSpc>
+              <a:spcBef>
+                <a:spcPts val="0"/>
+              </a:spcBef>
+              <a:spcAft>
+                <a:spcPts val="0"/>
+              </a:spcAft>
+              <a:buClr>
+                <a:schemeClr val="dk2"/>
+              </a:buClr>
+              <a:buSzPts val="1400"/>
+              <a:buFont typeface="Fira Code"/>
+              <a:buChar char="●"/>
+              <a:defRPr sz="1400" b="0" i="0" u="none" strike="noStrike" cap="none">
+                <a:solidFill>
+                  <a:schemeClr val="dk2"/>
+                </a:solidFill>
+                <a:latin typeface="Fira Code"/>
+                <a:ea typeface="Fira Code"/>
+                <a:cs typeface="Fira Code"/>
+                <a:sym typeface="Fira Code"/>
+              </a:defRPr>
+            </a:lvl1pPr>
+            <a:lvl2pPr marL="914400" marR="0" lvl="1" indent="-317500" algn="l" rtl="0">
+              <a:lnSpc>
+                <a:spcPct val="100000"/>
+              </a:lnSpc>
+              <a:spcBef>
+                <a:spcPts val="0"/>
+              </a:spcBef>
+              <a:spcAft>
+                <a:spcPts val="0"/>
+              </a:spcAft>
+              <a:buClr>
+                <a:schemeClr val="dk2"/>
+              </a:buClr>
+              <a:buSzPts val="1400"/>
+              <a:buFont typeface="Fira Code"/>
+              <a:buChar char="○"/>
+              <a:defRPr sz="1400" b="0" i="0" u="none" strike="noStrike" cap="none">
+                <a:solidFill>
+                  <a:schemeClr val="dk2"/>
+                </a:solidFill>
+                <a:latin typeface="Fira Code"/>
+                <a:ea typeface="Fira Code"/>
+                <a:cs typeface="Fira Code"/>
+                <a:sym typeface="Fira Code"/>
+              </a:defRPr>
+            </a:lvl2pPr>
+            <a:lvl3pPr marL="1371600" marR="0" lvl="2" indent="-317500" algn="l" rtl="0">
+              <a:lnSpc>
+                <a:spcPct val="100000"/>
+              </a:lnSpc>
+              <a:spcBef>
+                <a:spcPts val="0"/>
+              </a:spcBef>
+              <a:spcAft>
+                <a:spcPts val="0"/>
+              </a:spcAft>
+              <a:buClr>
+                <a:schemeClr val="dk2"/>
+              </a:buClr>
+              <a:buSzPts val="1400"/>
+              <a:buFont typeface="Fira Code"/>
+              <a:buChar char="■"/>
+              <a:defRPr sz="1400" b="0" i="0" u="none" strike="noStrike" cap="none">
+                <a:solidFill>
+                  <a:schemeClr val="dk2"/>
+                </a:solidFill>
+                <a:latin typeface="Fira Code"/>
+                <a:ea typeface="Fira Code"/>
+                <a:cs typeface="Fira Code"/>
+                <a:sym typeface="Fira Code"/>
+              </a:defRPr>
+            </a:lvl3pPr>
+            <a:lvl4pPr marL="1828800" marR="0" lvl="3" indent="-317500" algn="l" rtl="0">
+              <a:lnSpc>
+                <a:spcPct val="100000"/>
+              </a:lnSpc>
+              <a:spcBef>
+                <a:spcPts val="0"/>
+              </a:spcBef>
+              <a:spcAft>
+                <a:spcPts val="0"/>
+              </a:spcAft>
+              <a:buClr>
+                <a:schemeClr val="dk2"/>
+              </a:buClr>
+              <a:buSzPts val="1400"/>
+              <a:buFont typeface="Fira Code"/>
+              <a:buChar char="●"/>
+              <a:defRPr sz="1400" b="0" i="0" u="none" strike="noStrike" cap="none">
+                <a:solidFill>
+                  <a:schemeClr val="dk2"/>
+                </a:solidFill>
+                <a:latin typeface="Fira Code"/>
+                <a:ea typeface="Fira Code"/>
+                <a:cs typeface="Fira Code"/>
+                <a:sym typeface="Fira Code"/>
+              </a:defRPr>
+            </a:lvl4pPr>
+            <a:lvl5pPr marL="2286000" marR="0" lvl="4" indent="-317500" algn="l" rtl="0">
+              <a:lnSpc>
+                <a:spcPct val="100000"/>
+              </a:lnSpc>
+              <a:spcBef>
+                <a:spcPts val="0"/>
+              </a:spcBef>
+              <a:spcAft>
+                <a:spcPts val="0"/>
+              </a:spcAft>
+              <a:buClr>
+                <a:schemeClr val="dk2"/>
+              </a:buClr>
+              <a:buSzPts val="1400"/>
+              <a:buFont typeface="Fira Code"/>
+              <a:buChar char="○"/>
+              <a:defRPr sz="1400" b="0" i="0" u="none" strike="noStrike" cap="none">
+                <a:solidFill>
+                  <a:schemeClr val="dk2"/>
+                </a:solidFill>
+                <a:latin typeface="Fira Code"/>
+                <a:ea typeface="Fira Code"/>
+                <a:cs typeface="Fira Code"/>
+                <a:sym typeface="Fira Code"/>
+              </a:defRPr>
+            </a:lvl5pPr>
+            <a:lvl6pPr marL="2743200" marR="0" lvl="5" indent="-317500" algn="l" rtl="0">
+              <a:lnSpc>
+                <a:spcPct val="100000"/>
+              </a:lnSpc>
+              <a:spcBef>
+                <a:spcPts val="0"/>
+              </a:spcBef>
+              <a:spcAft>
+                <a:spcPts val="0"/>
+              </a:spcAft>
+              <a:buClr>
+                <a:schemeClr val="dk2"/>
+              </a:buClr>
+              <a:buSzPts val="1400"/>
+              <a:buFont typeface="Fira Code"/>
+              <a:buChar char="■"/>
+              <a:defRPr sz="1400" b="0" i="0" u="none" strike="noStrike" cap="none">
+                <a:solidFill>
+                  <a:schemeClr val="dk2"/>
+                </a:solidFill>
+                <a:latin typeface="Fira Code"/>
+                <a:ea typeface="Fira Code"/>
+                <a:cs typeface="Fira Code"/>
+                <a:sym typeface="Fira Code"/>
+              </a:defRPr>
+            </a:lvl6pPr>
+            <a:lvl7pPr marL="3200400" marR="0" lvl="6" indent="-317500" algn="l" rtl="0">
+              <a:lnSpc>
+                <a:spcPct val="100000"/>
+              </a:lnSpc>
+              <a:spcBef>
+                <a:spcPts val="0"/>
+              </a:spcBef>
+              <a:spcAft>
+                <a:spcPts val="0"/>
+              </a:spcAft>
+              <a:buClr>
+                <a:schemeClr val="dk2"/>
+              </a:buClr>
+              <a:buSzPts val="1400"/>
+              <a:buFont typeface="Fira Code"/>
+              <a:buChar char="●"/>
+              <a:defRPr sz="1400" b="0" i="0" u="none" strike="noStrike" cap="none">
+                <a:solidFill>
+                  <a:schemeClr val="dk2"/>
+                </a:solidFill>
+                <a:latin typeface="Fira Code"/>
+                <a:ea typeface="Fira Code"/>
+                <a:cs typeface="Fira Code"/>
+                <a:sym typeface="Fira Code"/>
+              </a:defRPr>
+            </a:lvl7pPr>
+            <a:lvl8pPr marL="3657600" marR="0" lvl="7" indent="-317500" algn="l" rtl="0">
+              <a:lnSpc>
+                <a:spcPct val="100000"/>
+              </a:lnSpc>
+              <a:spcBef>
+                <a:spcPts val="0"/>
+              </a:spcBef>
+              <a:spcAft>
+                <a:spcPts val="0"/>
+              </a:spcAft>
+              <a:buClr>
+                <a:schemeClr val="dk2"/>
+              </a:buClr>
+              <a:buSzPts val="1400"/>
+              <a:buFont typeface="Fira Code"/>
+              <a:buChar char="○"/>
+              <a:defRPr sz="1400" b="0" i="0" u="none" strike="noStrike" cap="none">
+                <a:solidFill>
+                  <a:schemeClr val="dk2"/>
+                </a:solidFill>
+                <a:latin typeface="Fira Code"/>
+                <a:ea typeface="Fira Code"/>
+                <a:cs typeface="Fira Code"/>
+                <a:sym typeface="Fira Code"/>
+              </a:defRPr>
+            </a:lvl8pPr>
+            <a:lvl9pPr marL="4114800" marR="0" lvl="8" indent="-317500" algn="l" rtl="0">
+              <a:lnSpc>
+                <a:spcPct val="100000"/>
+              </a:lnSpc>
+              <a:spcBef>
+                <a:spcPts val="0"/>
+              </a:spcBef>
+              <a:spcAft>
+                <a:spcPts val="0"/>
+              </a:spcAft>
+              <a:buClr>
+                <a:schemeClr val="dk2"/>
+              </a:buClr>
+              <a:buSzPts val="1400"/>
+              <a:buFont typeface="Fira Code"/>
+              <a:buChar char="■"/>
+              <a:defRPr sz="1400" b="0" i="0" u="none" strike="noStrike" cap="none">
+                <a:solidFill>
+                  <a:schemeClr val="dk2"/>
+                </a:solidFill>
+                <a:latin typeface="Fira Code"/>
+                <a:ea typeface="Fira Code"/>
+                <a:cs typeface="Fira Code"/>
+                <a:sym typeface="Fira Code"/>
+              </a:defRPr>
+            </a:lvl9pPr>
+          </a:lstStyle>
+          <a:p>
+            <a:pPr marL="0" indent="0" algn="ctr">
+              <a:buFont typeface="Fira Code"/>
+              <a:buNone/>
+            </a:pPr>
+            <a:r>
+              <a:rPr lang="en-US" dirty="0">
+                <a:solidFill>
+                  <a:schemeClr val="accent3"/>
+                </a:solidFill>
+              </a:rPr>
+              <a:t>HW1</a:t>
+            </a:r>
+          </a:p>
+        </p:txBody>
+      </p:sp>
+      <p:sp>
+        <p:nvSpPr>
+          <p:cNvPr id="3" name="Google Shape;473;p28">
+            <a:extLst>
+              <a:ext uri="{FF2B5EF4-FFF2-40B4-BE49-F238E27FC236}">
+                <a16:creationId xmlns:a16="http://schemas.microsoft.com/office/drawing/2014/main" id="{8073E31E-73FF-9229-2685-C976A44D7483}"/>
+              </a:ext>
+            </a:extLst>
+          </p:cNvPr>
+          <p:cNvSpPr txBox="1">
+            <a:spLocks/>
+          </p:cNvSpPr>
+          <p:nvPr/>
+        </p:nvSpPr>
+        <p:spPr>
+          <a:xfrm>
+            <a:off x="710125" y="4694725"/>
+            <a:ext cx="4865100" cy="357300"/>
+          </a:xfrm>
+          <a:prstGeom prst="rect">
+            <a:avLst/>
+          </a:prstGeom>
+          <a:noFill/>
+          <a:ln>
+            <a:noFill/>
+          </a:ln>
+        </p:spPr>
+        <p:txBody>
+          <a:bodyPr spcFirstLastPara="1" wrap="square" lIns="91425" tIns="91425" rIns="91425" bIns="91425" anchor="ctr" anchorCtr="0">
+            <a:noAutofit/>
+          </a:bodyPr>
+          <a:lstStyle>
+            <a:defPPr marR="0" lvl="0" algn="l" rtl="0">
+              <a:lnSpc>
+                <a:spcPct val="100000"/>
+              </a:lnSpc>
+              <a:spcBef>
+                <a:spcPts val="0"/>
+              </a:spcBef>
+              <a:spcAft>
+                <a:spcPts val="0"/>
+              </a:spcAft>
+            </a:defPPr>
+            <a:lvl1pPr marL="457200" marR="0" lvl="0" indent="-317500" algn="l" rtl="0">
+              <a:lnSpc>
+                <a:spcPct val="100000"/>
+              </a:lnSpc>
+              <a:spcBef>
+                <a:spcPts val="0"/>
+              </a:spcBef>
+              <a:spcAft>
+                <a:spcPts val="0"/>
+              </a:spcAft>
+              <a:buClr>
+                <a:schemeClr val="dk2"/>
+              </a:buClr>
+              <a:buSzPts val="1400"/>
+              <a:buFont typeface="Fira Code"/>
+              <a:buChar char="●"/>
+              <a:defRPr sz="1400" b="0" i="0" u="none" strike="noStrike" cap="none">
+                <a:solidFill>
+                  <a:schemeClr val="dk2"/>
+                </a:solidFill>
+                <a:latin typeface="Fira Code"/>
+                <a:ea typeface="Fira Code"/>
+                <a:cs typeface="Fira Code"/>
+                <a:sym typeface="Fira Code"/>
+              </a:defRPr>
+            </a:lvl1pPr>
+            <a:lvl2pPr marL="914400" marR="0" lvl="1" indent="-317500" algn="l" rtl="0">
+              <a:lnSpc>
+                <a:spcPct val="100000"/>
+              </a:lnSpc>
+              <a:spcBef>
+                <a:spcPts val="0"/>
+              </a:spcBef>
+              <a:spcAft>
+                <a:spcPts val="0"/>
+              </a:spcAft>
+              <a:buClr>
+                <a:schemeClr val="dk2"/>
+              </a:buClr>
+              <a:buSzPts val="1400"/>
+              <a:buFont typeface="Fira Code"/>
+              <a:buChar char="○"/>
+              <a:defRPr sz="1400" b="0" i="0" u="none" strike="noStrike" cap="none">
+                <a:solidFill>
+                  <a:schemeClr val="dk2"/>
+                </a:solidFill>
+                <a:latin typeface="Fira Code"/>
+                <a:ea typeface="Fira Code"/>
+                <a:cs typeface="Fira Code"/>
+                <a:sym typeface="Fira Code"/>
+              </a:defRPr>
+            </a:lvl2pPr>
+            <a:lvl3pPr marL="1371600" marR="0" lvl="2" indent="-317500" algn="l" rtl="0">
+              <a:lnSpc>
+                <a:spcPct val="100000"/>
+              </a:lnSpc>
+              <a:spcBef>
+                <a:spcPts val="0"/>
+              </a:spcBef>
+              <a:spcAft>
+                <a:spcPts val="0"/>
+              </a:spcAft>
+              <a:buClr>
+                <a:schemeClr val="dk2"/>
+              </a:buClr>
+              <a:buSzPts val="1400"/>
+              <a:buFont typeface="Fira Code"/>
+              <a:buChar char="■"/>
+              <a:defRPr sz="1400" b="0" i="0" u="none" strike="noStrike" cap="none">
+                <a:solidFill>
+                  <a:schemeClr val="dk2"/>
+                </a:solidFill>
+                <a:latin typeface="Fira Code"/>
+                <a:ea typeface="Fira Code"/>
+                <a:cs typeface="Fira Code"/>
+                <a:sym typeface="Fira Code"/>
+              </a:defRPr>
+            </a:lvl3pPr>
+            <a:lvl4pPr marL="1828800" marR="0" lvl="3" indent="-317500" algn="l" rtl="0">
+              <a:lnSpc>
+                <a:spcPct val="100000"/>
+              </a:lnSpc>
+              <a:spcBef>
+                <a:spcPts val="0"/>
+              </a:spcBef>
+              <a:spcAft>
+                <a:spcPts val="0"/>
+              </a:spcAft>
+              <a:buClr>
+                <a:schemeClr val="dk2"/>
+              </a:buClr>
+              <a:buSzPts val="1400"/>
+              <a:buFont typeface="Fira Code"/>
+              <a:buChar char="●"/>
+              <a:defRPr sz="1400" b="0" i="0" u="none" strike="noStrike" cap="none">
+                <a:solidFill>
+                  <a:schemeClr val="dk2"/>
+                </a:solidFill>
+                <a:latin typeface="Fira Code"/>
+                <a:ea typeface="Fira Code"/>
+                <a:cs typeface="Fira Code"/>
+                <a:sym typeface="Fira Code"/>
+              </a:defRPr>
+            </a:lvl4pPr>
+            <a:lvl5pPr marL="2286000" marR="0" lvl="4" indent="-317500" algn="l" rtl="0">
+              <a:lnSpc>
+                <a:spcPct val="100000"/>
+              </a:lnSpc>
+              <a:spcBef>
+                <a:spcPts val="0"/>
+              </a:spcBef>
+              <a:spcAft>
+                <a:spcPts val="0"/>
+              </a:spcAft>
+              <a:buClr>
+                <a:schemeClr val="dk2"/>
+              </a:buClr>
+              <a:buSzPts val="1400"/>
+              <a:buFont typeface="Fira Code"/>
+              <a:buChar char="○"/>
+              <a:defRPr sz="1400" b="0" i="0" u="none" strike="noStrike" cap="none">
+                <a:solidFill>
+                  <a:schemeClr val="dk2"/>
+                </a:solidFill>
+                <a:latin typeface="Fira Code"/>
+                <a:ea typeface="Fira Code"/>
+                <a:cs typeface="Fira Code"/>
+                <a:sym typeface="Fira Code"/>
+              </a:defRPr>
+            </a:lvl5pPr>
+            <a:lvl6pPr marL="2743200" marR="0" lvl="5" indent="-317500" algn="l" rtl="0">
+              <a:lnSpc>
+                <a:spcPct val="100000"/>
+              </a:lnSpc>
+              <a:spcBef>
+                <a:spcPts val="0"/>
+              </a:spcBef>
+              <a:spcAft>
+                <a:spcPts val="0"/>
+              </a:spcAft>
+              <a:buClr>
+                <a:schemeClr val="dk2"/>
+              </a:buClr>
+              <a:buSzPts val="1400"/>
+              <a:buFont typeface="Fira Code"/>
+              <a:buChar char="■"/>
+              <a:defRPr sz="1400" b="0" i="0" u="none" strike="noStrike" cap="none">
+                <a:solidFill>
+                  <a:schemeClr val="dk2"/>
+                </a:solidFill>
+                <a:latin typeface="Fira Code"/>
+                <a:ea typeface="Fira Code"/>
+                <a:cs typeface="Fira Code"/>
+                <a:sym typeface="Fira Code"/>
+              </a:defRPr>
+            </a:lvl6pPr>
+            <a:lvl7pPr marL="3200400" marR="0" lvl="6" indent="-317500" algn="l" rtl="0">
+              <a:lnSpc>
+                <a:spcPct val="100000"/>
+              </a:lnSpc>
+              <a:spcBef>
+                <a:spcPts val="0"/>
+              </a:spcBef>
+              <a:spcAft>
+                <a:spcPts val="0"/>
+              </a:spcAft>
+              <a:buClr>
+                <a:schemeClr val="dk2"/>
+              </a:buClr>
+              <a:buSzPts val="1400"/>
+              <a:buFont typeface="Fira Code"/>
+              <a:buChar char="●"/>
+              <a:defRPr sz="1400" b="0" i="0" u="none" strike="noStrike" cap="none">
+                <a:solidFill>
+                  <a:schemeClr val="dk2"/>
+                </a:solidFill>
+                <a:latin typeface="Fira Code"/>
+                <a:ea typeface="Fira Code"/>
+                <a:cs typeface="Fira Code"/>
+                <a:sym typeface="Fira Code"/>
+              </a:defRPr>
+            </a:lvl7pPr>
+            <a:lvl8pPr marL="3657600" marR="0" lvl="7" indent="-317500" algn="l" rtl="0">
+              <a:lnSpc>
+                <a:spcPct val="100000"/>
+              </a:lnSpc>
+              <a:spcBef>
+                <a:spcPts val="0"/>
+              </a:spcBef>
+              <a:spcAft>
+                <a:spcPts val="0"/>
+              </a:spcAft>
+              <a:buClr>
+                <a:schemeClr val="dk2"/>
+              </a:buClr>
+              <a:buSzPts val="1400"/>
+              <a:buFont typeface="Fira Code"/>
+              <a:buChar char="○"/>
+              <a:defRPr sz="1400" b="0" i="0" u="none" strike="noStrike" cap="none">
+                <a:solidFill>
+                  <a:schemeClr val="dk2"/>
+                </a:solidFill>
+                <a:latin typeface="Fira Code"/>
+                <a:ea typeface="Fira Code"/>
+                <a:cs typeface="Fira Code"/>
+                <a:sym typeface="Fira Code"/>
+              </a:defRPr>
+            </a:lvl8pPr>
+            <a:lvl9pPr marL="4114800" marR="0" lvl="8" indent="-317500" algn="l" rtl="0">
+              <a:lnSpc>
+                <a:spcPct val="100000"/>
+              </a:lnSpc>
+              <a:spcBef>
+                <a:spcPts val="0"/>
+              </a:spcBef>
+              <a:spcAft>
+                <a:spcPts val="0"/>
+              </a:spcAft>
+              <a:buClr>
+                <a:schemeClr val="dk2"/>
+              </a:buClr>
+              <a:buSzPts val="1400"/>
+              <a:buFont typeface="Fira Code"/>
+              <a:buChar char="■"/>
+              <a:defRPr sz="1400" b="0" i="0" u="none" strike="noStrike" cap="none">
+                <a:solidFill>
+                  <a:schemeClr val="dk2"/>
+                </a:solidFill>
+                <a:latin typeface="Fira Code"/>
+                <a:ea typeface="Fira Code"/>
+                <a:cs typeface="Fira Code"/>
+                <a:sym typeface="Fira Code"/>
+              </a:defRPr>
+            </a:lvl9pPr>
+          </a:lstStyle>
+          <a:p>
+            <a:pPr marL="0" indent="0">
+              <a:buFont typeface="Fira Code"/>
+              <a:buNone/>
+            </a:pPr>
+            <a:r>
+              <a:rPr lang="en-US">
+                <a:solidFill>
+                  <a:schemeClr val="accent3"/>
+                </a:solidFill>
+              </a:rPr>
+              <a:t>Programming Language Lab</a:t>
+            </a:r>
+            <a:endParaRPr lang="en-US" dirty="0">
+              <a:solidFill>
+                <a:schemeClr val="accent3"/>
+              </a:solidFill>
+            </a:endParaRPr>
+          </a:p>
+        </p:txBody>
+      </p:sp>
+      <p:sp>
+        <p:nvSpPr>
+          <p:cNvPr id="4" name="Google Shape;473;p28">
+            <a:extLst>
+              <a:ext uri="{FF2B5EF4-FFF2-40B4-BE49-F238E27FC236}">
+                <a16:creationId xmlns:a16="http://schemas.microsoft.com/office/drawing/2014/main" id="{073B19AE-F618-D286-3BAD-061CFBB361B3}"/>
+              </a:ext>
+            </a:extLst>
+          </p:cNvPr>
+          <p:cNvSpPr txBox="1">
+            <a:spLocks/>
+          </p:cNvSpPr>
+          <p:nvPr/>
+        </p:nvSpPr>
+        <p:spPr>
+          <a:xfrm>
+            <a:off x="8433851" y="4694675"/>
+            <a:ext cx="319124" cy="357300"/>
+          </a:xfrm>
+          <a:prstGeom prst="rect">
+            <a:avLst/>
+          </a:prstGeom>
+          <a:noFill/>
+          <a:ln>
+            <a:noFill/>
+          </a:ln>
+        </p:spPr>
+        <p:txBody>
+          <a:bodyPr spcFirstLastPara="1" wrap="square" lIns="91425" tIns="91425" rIns="91425" bIns="91425" anchor="ctr" anchorCtr="0">
+            <a:noAutofit/>
+          </a:bodyPr>
+          <a:lstStyle>
+            <a:defPPr marR="0" lvl="0" algn="l" rtl="0">
+              <a:lnSpc>
+                <a:spcPct val="100000"/>
+              </a:lnSpc>
+              <a:spcBef>
+                <a:spcPts val="0"/>
+              </a:spcBef>
+              <a:spcAft>
+                <a:spcPts val="0"/>
+              </a:spcAft>
+            </a:defPPr>
+            <a:lvl1pPr marL="457200" marR="0" lvl="0" indent="-317500" algn="l" rtl="0">
+              <a:lnSpc>
+                <a:spcPct val="100000"/>
+              </a:lnSpc>
+              <a:spcBef>
+                <a:spcPts val="0"/>
+              </a:spcBef>
+              <a:spcAft>
+                <a:spcPts val="0"/>
+              </a:spcAft>
+              <a:buClr>
+                <a:schemeClr val="dk2"/>
+              </a:buClr>
+              <a:buSzPts val="1400"/>
+              <a:buFont typeface="Fira Code"/>
+              <a:buChar char="●"/>
+              <a:defRPr sz="1400" b="0" i="0" u="none" strike="noStrike" cap="none">
+                <a:solidFill>
+                  <a:schemeClr val="dk2"/>
+                </a:solidFill>
+                <a:latin typeface="Fira Code"/>
+                <a:ea typeface="Fira Code"/>
+                <a:cs typeface="Fira Code"/>
+                <a:sym typeface="Fira Code"/>
+              </a:defRPr>
+            </a:lvl1pPr>
+            <a:lvl2pPr marL="914400" marR="0" lvl="1" indent="-317500" algn="l" rtl="0">
+              <a:lnSpc>
+                <a:spcPct val="100000"/>
+              </a:lnSpc>
+              <a:spcBef>
+                <a:spcPts val="0"/>
+              </a:spcBef>
+              <a:spcAft>
+                <a:spcPts val="0"/>
+              </a:spcAft>
+              <a:buClr>
+                <a:schemeClr val="dk2"/>
+              </a:buClr>
+              <a:buSzPts val="1400"/>
+              <a:buFont typeface="Fira Code"/>
+              <a:buChar char="○"/>
+              <a:defRPr sz="1400" b="0" i="0" u="none" strike="noStrike" cap="none">
+                <a:solidFill>
+                  <a:schemeClr val="dk2"/>
+                </a:solidFill>
+                <a:latin typeface="Fira Code"/>
+                <a:ea typeface="Fira Code"/>
+                <a:cs typeface="Fira Code"/>
+                <a:sym typeface="Fira Code"/>
+              </a:defRPr>
+            </a:lvl2pPr>
+            <a:lvl3pPr marL="1371600" marR="0" lvl="2" indent="-317500" algn="l" rtl="0">
+              <a:lnSpc>
+                <a:spcPct val="100000"/>
+              </a:lnSpc>
+              <a:spcBef>
+                <a:spcPts val="0"/>
+              </a:spcBef>
+              <a:spcAft>
+                <a:spcPts val="0"/>
+              </a:spcAft>
+              <a:buClr>
+                <a:schemeClr val="dk2"/>
+              </a:buClr>
+              <a:buSzPts val="1400"/>
+              <a:buFont typeface="Fira Code"/>
+              <a:buChar char="■"/>
+              <a:defRPr sz="1400" b="0" i="0" u="none" strike="noStrike" cap="none">
+                <a:solidFill>
+                  <a:schemeClr val="dk2"/>
+                </a:solidFill>
+                <a:latin typeface="Fira Code"/>
+                <a:ea typeface="Fira Code"/>
+                <a:cs typeface="Fira Code"/>
+                <a:sym typeface="Fira Code"/>
+              </a:defRPr>
+            </a:lvl3pPr>
+            <a:lvl4pPr marL="1828800" marR="0" lvl="3" indent="-317500" algn="l" rtl="0">
+              <a:lnSpc>
+                <a:spcPct val="100000"/>
+              </a:lnSpc>
+              <a:spcBef>
+                <a:spcPts val="0"/>
+              </a:spcBef>
+              <a:spcAft>
+                <a:spcPts val="0"/>
+              </a:spcAft>
+              <a:buClr>
+                <a:schemeClr val="dk2"/>
+              </a:buClr>
+              <a:buSzPts val="1400"/>
+              <a:buFont typeface="Fira Code"/>
+              <a:buChar char="●"/>
+              <a:defRPr sz="1400" b="0" i="0" u="none" strike="noStrike" cap="none">
+                <a:solidFill>
+                  <a:schemeClr val="dk2"/>
+                </a:solidFill>
+                <a:latin typeface="Fira Code"/>
+                <a:ea typeface="Fira Code"/>
+                <a:cs typeface="Fira Code"/>
+                <a:sym typeface="Fira Code"/>
+              </a:defRPr>
+            </a:lvl4pPr>
+            <a:lvl5pPr marL="2286000" marR="0" lvl="4" indent="-317500" algn="l" rtl="0">
+              <a:lnSpc>
+                <a:spcPct val="100000"/>
+              </a:lnSpc>
+              <a:spcBef>
+                <a:spcPts val="0"/>
+              </a:spcBef>
+              <a:spcAft>
+                <a:spcPts val="0"/>
+              </a:spcAft>
+              <a:buClr>
+                <a:schemeClr val="dk2"/>
+              </a:buClr>
+              <a:buSzPts val="1400"/>
+              <a:buFont typeface="Fira Code"/>
+              <a:buChar char="○"/>
+              <a:defRPr sz="1400" b="0" i="0" u="none" strike="noStrike" cap="none">
+                <a:solidFill>
+                  <a:schemeClr val="dk2"/>
+                </a:solidFill>
+                <a:latin typeface="Fira Code"/>
+                <a:ea typeface="Fira Code"/>
+                <a:cs typeface="Fira Code"/>
+                <a:sym typeface="Fira Code"/>
+              </a:defRPr>
+            </a:lvl5pPr>
+            <a:lvl6pPr marL="2743200" marR="0" lvl="5" indent="-317500" algn="l" rtl="0">
+              <a:lnSpc>
+                <a:spcPct val="100000"/>
+              </a:lnSpc>
+              <a:spcBef>
+                <a:spcPts val="0"/>
+              </a:spcBef>
+              <a:spcAft>
+                <a:spcPts val="0"/>
+              </a:spcAft>
+              <a:buClr>
+                <a:schemeClr val="dk2"/>
+              </a:buClr>
+              <a:buSzPts val="1400"/>
+              <a:buFont typeface="Fira Code"/>
+              <a:buChar char="■"/>
+              <a:defRPr sz="1400" b="0" i="0" u="none" strike="noStrike" cap="none">
+                <a:solidFill>
+                  <a:schemeClr val="dk2"/>
+                </a:solidFill>
+                <a:latin typeface="Fira Code"/>
+                <a:ea typeface="Fira Code"/>
+                <a:cs typeface="Fira Code"/>
+                <a:sym typeface="Fira Code"/>
+              </a:defRPr>
+            </a:lvl6pPr>
+            <a:lvl7pPr marL="3200400" marR="0" lvl="6" indent="-317500" algn="l" rtl="0">
+              <a:lnSpc>
+                <a:spcPct val="100000"/>
+              </a:lnSpc>
+              <a:spcBef>
+                <a:spcPts val="0"/>
+              </a:spcBef>
+              <a:spcAft>
+                <a:spcPts val="0"/>
+              </a:spcAft>
+              <a:buClr>
+                <a:schemeClr val="dk2"/>
+              </a:buClr>
+              <a:buSzPts val="1400"/>
+              <a:buFont typeface="Fira Code"/>
+              <a:buChar char="●"/>
+              <a:defRPr sz="1400" b="0" i="0" u="none" strike="noStrike" cap="none">
+                <a:solidFill>
+                  <a:schemeClr val="dk2"/>
+                </a:solidFill>
+                <a:latin typeface="Fira Code"/>
+                <a:ea typeface="Fira Code"/>
+                <a:cs typeface="Fira Code"/>
+                <a:sym typeface="Fira Code"/>
+              </a:defRPr>
+            </a:lvl7pPr>
+            <a:lvl8pPr marL="3657600" marR="0" lvl="7" indent="-317500" algn="l" rtl="0">
+              <a:lnSpc>
+                <a:spcPct val="100000"/>
+              </a:lnSpc>
+              <a:spcBef>
+                <a:spcPts val="0"/>
+              </a:spcBef>
+              <a:spcAft>
+                <a:spcPts val="0"/>
+              </a:spcAft>
+              <a:buClr>
+                <a:schemeClr val="dk2"/>
+              </a:buClr>
+              <a:buSzPts val="1400"/>
+              <a:buFont typeface="Fira Code"/>
+              <a:buChar char="○"/>
+              <a:defRPr sz="1400" b="0" i="0" u="none" strike="noStrike" cap="none">
+                <a:solidFill>
+                  <a:schemeClr val="dk2"/>
+                </a:solidFill>
+                <a:latin typeface="Fira Code"/>
+                <a:ea typeface="Fira Code"/>
+                <a:cs typeface="Fira Code"/>
+                <a:sym typeface="Fira Code"/>
+              </a:defRPr>
+            </a:lvl8pPr>
+            <a:lvl9pPr marL="4114800" marR="0" lvl="8" indent="-317500" algn="l" rtl="0">
+              <a:lnSpc>
+                <a:spcPct val="100000"/>
+              </a:lnSpc>
+              <a:spcBef>
+                <a:spcPts val="0"/>
+              </a:spcBef>
+              <a:spcAft>
+                <a:spcPts val="0"/>
+              </a:spcAft>
+              <a:buClr>
+                <a:schemeClr val="dk2"/>
+              </a:buClr>
+              <a:buSzPts val="1400"/>
+              <a:buFont typeface="Fira Code"/>
+              <a:buChar char="■"/>
+              <a:defRPr sz="1400" b="0" i="0" u="none" strike="noStrike" cap="none">
+                <a:solidFill>
+                  <a:schemeClr val="dk2"/>
+                </a:solidFill>
+                <a:latin typeface="Fira Code"/>
+                <a:ea typeface="Fira Code"/>
+                <a:cs typeface="Fira Code"/>
+                <a:sym typeface="Fira Code"/>
+              </a:defRPr>
+            </a:lvl9pPr>
+          </a:lstStyle>
+          <a:p>
+            <a:pPr marL="0" indent="0">
+              <a:buFont typeface="Fira Code"/>
+              <a:buNone/>
+            </a:pPr>
+            <a:r>
+              <a:rPr lang="fa-IR" sz="1100" dirty="0">
+                <a:solidFill>
+                  <a:schemeClr val="accent3"/>
+                </a:solidFill>
+              </a:rPr>
+              <a:t>9</a:t>
+            </a:r>
+            <a:endParaRPr lang="en" dirty="0">
+              <a:solidFill>
+                <a:schemeClr val="accent3"/>
+              </a:solidFill>
+            </a:endParaRPr>
+          </a:p>
+        </p:txBody>
+      </p:sp>
+    </p:spTree>
+    <p:extLst>
+      <p:ext uri="{BB962C8B-B14F-4D97-AF65-F5344CB8AC3E}">
+        <p14:creationId xmlns:p14="http://schemas.microsoft.com/office/powerpoint/2010/main" val="2873078153"/>
+      </p:ext>
+    </p:extLst>
+  </p:cSld>
+  <p:clrMapOvr>
+    <a:masterClrMapping/>
+  </p:clrMapOvr>
+</p:sld>
+</file>
+
+<file path=ppt/slides/slide12.xml><?xml version="1.0" encoding="utf-8"?>
+<p:sld xmlns:a="http://schemas.openxmlformats.org/drawingml/2006/main" xmlns:r="http://schemas.openxmlformats.org/officeDocument/2006/relationships" xmlns:p="http://schemas.openxmlformats.org/presentationml/2006/main">
+  <p:cSld>
+    <p:spTree>
+      <p:nvGrpSpPr>
+        <p:cNvPr id="1" name="">
+          <a:extLst>
+            <a:ext uri="{FF2B5EF4-FFF2-40B4-BE49-F238E27FC236}">
+              <a16:creationId xmlns:a16="http://schemas.microsoft.com/office/drawing/2014/main" id="{27BF3AB1-C0AD-33F9-2DCE-5323C9F8496E}"/>
+            </a:ext>
+          </a:extLst>
+        </p:cNvPr>
+        <p:cNvGrpSpPr/>
+        <p:nvPr/>
+      </p:nvGrpSpPr>
+      <p:grpSpPr>
+        <a:xfrm>
+          <a:off x="0" y="0"/>
+          <a:ext cx="0" cy="0"/>
+          <a:chOff x="0" y="0"/>
+          <a:chExt cx="0" cy="0"/>
+        </a:xfrm>
+      </p:grpSpPr>
+      <p:sp>
+        <p:nvSpPr>
+          <p:cNvPr id="2" name="Title 1">
+            <a:extLst>
+              <a:ext uri="{FF2B5EF4-FFF2-40B4-BE49-F238E27FC236}">
+                <a16:creationId xmlns:a16="http://schemas.microsoft.com/office/drawing/2014/main" id="{BAF9ACB2-1AA3-8301-D105-E5A9908800A0}"/>
+              </a:ext>
+            </a:extLst>
+          </p:cNvPr>
+          <p:cNvSpPr>
+            <a:spLocks noGrp="1"/>
+          </p:cNvSpPr>
+          <p:nvPr>
+            <p:ph type="title"/>
+          </p:nvPr>
+        </p:nvSpPr>
+        <p:spPr>
+          <a:xfrm>
+            <a:off x="1143250" y="582700"/>
+            <a:ext cx="7290600" cy="473285"/>
+          </a:xfrm>
+        </p:spPr>
+        <p:txBody>
+          <a:bodyPr/>
+          <a:lstStyle/>
+          <a:p>
+            <a:r>
+              <a:rPr lang="en-US" sz="2400" dirty="0">
+                <a:solidFill>
+                  <a:schemeClr val="accent2"/>
+                </a:solidFill>
+              </a:rPr>
+              <a:t>Home Work</a:t>
+            </a:r>
+          </a:p>
+        </p:txBody>
+      </p:sp>
+      <p:sp>
+        <p:nvSpPr>
+          <p:cNvPr id="6" name="TextBox 5">
+            <a:extLst>
+              <a:ext uri="{FF2B5EF4-FFF2-40B4-BE49-F238E27FC236}">
+                <a16:creationId xmlns:a16="http://schemas.microsoft.com/office/drawing/2014/main" id="{11E4F4E4-FF31-5854-2E74-41BA5FD1AE32}"/>
+              </a:ext>
+            </a:extLst>
+          </p:cNvPr>
+          <p:cNvSpPr txBox="1"/>
+          <p:nvPr/>
+        </p:nvSpPr>
+        <p:spPr>
+          <a:xfrm>
+            <a:off x="1143250" y="1055985"/>
+            <a:ext cx="8000750" cy="3539430"/>
+          </a:xfrm>
+          <a:prstGeom prst="rect">
+            <a:avLst/>
+          </a:prstGeom>
+          <a:noFill/>
+        </p:spPr>
+        <p:txBody>
+          <a:bodyPr wrap="square">
+            <a:spAutoFit/>
+          </a:bodyPr>
+          <a:lstStyle/>
+          <a:p>
+            <a:pPr eaLnBrk="0" fontAlgn="base" hangingPunct="0">
+              <a:spcBef>
+                <a:spcPct val="0"/>
+              </a:spcBef>
+              <a:spcAft>
+                <a:spcPct val="0"/>
+              </a:spcAft>
+              <a:buClrTx/>
+            </a:pPr>
+            <a:r>
+              <a:rPr lang="en-US" altLang="en-US" dirty="0">
+                <a:solidFill>
+                  <a:schemeClr val="accent1"/>
+                </a:solidFill>
+                <a:latin typeface="Fira Code"/>
+                <a:ea typeface="Fira Code"/>
+                <a:cs typeface="Fira Code"/>
+              </a:rPr>
+              <a:t>Write a C program that performs the following tasks:</a:t>
+            </a:r>
+          </a:p>
+          <a:p>
+            <a:pPr eaLnBrk="0" fontAlgn="base" hangingPunct="0">
+              <a:spcBef>
+                <a:spcPct val="0"/>
+              </a:spcBef>
+              <a:spcAft>
+                <a:spcPct val="0"/>
+              </a:spcAft>
+              <a:buClrTx/>
+            </a:pPr>
+            <a:r>
+              <a:rPr lang="en-US" altLang="en-US" dirty="0">
+                <a:solidFill>
+                  <a:schemeClr val="accent1"/>
+                </a:solidFill>
+                <a:latin typeface="Fira Code"/>
+                <a:ea typeface="Fira Code"/>
+                <a:cs typeface="Fira Code"/>
+              </a:rPr>
+              <a:t>Takes a positive integer from the user.</a:t>
+            </a:r>
+          </a:p>
+          <a:p>
+            <a:pPr eaLnBrk="0" fontAlgn="base" hangingPunct="0">
+              <a:spcBef>
+                <a:spcPct val="0"/>
+              </a:spcBef>
+              <a:spcAft>
+                <a:spcPct val="0"/>
+              </a:spcAft>
+              <a:buClrTx/>
+            </a:pPr>
+            <a:r>
+              <a:rPr lang="en-US" altLang="en-US" dirty="0">
+                <a:solidFill>
+                  <a:schemeClr val="accent1"/>
+                </a:solidFill>
+                <a:latin typeface="Fira Code"/>
+                <a:ea typeface="Fira Code"/>
+                <a:cs typeface="Fira Code"/>
+              </a:rPr>
+              <a:t>Removes all digits that are not prime digits </a:t>
+            </a:r>
+            <a:r>
+              <a:rPr lang="en-US" dirty="0">
+                <a:solidFill>
+                  <a:schemeClr val="accent1"/>
+                </a:solidFill>
+                <a:latin typeface="Fira Code"/>
+                <a:ea typeface="Fira Code"/>
+                <a:cs typeface="Fira Code"/>
+              </a:rPr>
+              <a:t>(i.e., not in {2, 3, 5, 7})</a:t>
+            </a:r>
+            <a:endParaRPr lang="fa-IR" altLang="en-US" dirty="0">
+              <a:solidFill>
+                <a:schemeClr val="accent1"/>
+              </a:solidFill>
+              <a:latin typeface="Fira Code"/>
+              <a:ea typeface="Fira Code"/>
+            </a:endParaRPr>
+          </a:p>
+          <a:p>
+            <a:pPr eaLnBrk="0" fontAlgn="base" hangingPunct="0">
+              <a:spcBef>
+                <a:spcPct val="0"/>
+              </a:spcBef>
+              <a:spcAft>
+                <a:spcPct val="0"/>
+              </a:spcAft>
+              <a:buClrTx/>
+            </a:pPr>
+            <a:endParaRPr lang="fa-IR" altLang="en-US" dirty="0">
+              <a:solidFill>
+                <a:schemeClr val="accent1"/>
+              </a:solidFill>
+              <a:latin typeface="Fira Code"/>
+              <a:ea typeface="Fira Code"/>
+              <a:cs typeface="Fira Code"/>
+            </a:endParaRPr>
+          </a:p>
+          <a:p>
+            <a:pPr eaLnBrk="0" fontAlgn="base" hangingPunct="0">
+              <a:spcBef>
+                <a:spcPct val="0"/>
+              </a:spcBef>
+              <a:spcAft>
+                <a:spcPct val="0"/>
+              </a:spcAft>
+              <a:buClrTx/>
+            </a:pPr>
+            <a:r>
+              <a:rPr lang="en-US" altLang="en-US" dirty="0">
+                <a:solidFill>
+                  <a:schemeClr val="accent1"/>
+                </a:solidFill>
+                <a:latin typeface="Fira Code"/>
+                <a:ea typeface="Fira Code"/>
+                <a:cs typeface="Fira Code"/>
+              </a:rPr>
+              <a:t>Creates a new number composed only of the prime digits in the original order.</a:t>
+            </a:r>
+          </a:p>
+          <a:p>
+            <a:pPr eaLnBrk="0" fontAlgn="base" hangingPunct="0">
+              <a:spcBef>
+                <a:spcPct val="0"/>
+              </a:spcBef>
+              <a:spcAft>
+                <a:spcPct val="0"/>
+              </a:spcAft>
+              <a:buClrTx/>
+            </a:pPr>
+            <a:r>
+              <a:rPr lang="en-US" altLang="en-US" dirty="0">
+                <a:solidFill>
+                  <a:schemeClr val="accent1"/>
+                </a:solidFill>
+                <a:latin typeface="Fira Code"/>
+                <a:ea typeface="Fira Code"/>
+                <a:cs typeface="Fira Code"/>
+              </a:rPr>
+              <a:t>Recursively calculates the sum of the remaining digits.</a:t>
+            </a:r>
+            <a:endParaRPr lang="fa-IR" altLang="en-US" dirty="0">
+              <a:solidFill>
+                <a:schemeClr val="accent1"/>
+              </a:solidFill>
+              <a:latin typeface="Fira Code"/>
+              <a:ea typeface="Fira Code"/>
+              <a:cs typeface="Fira Code"/>
+            </a:endParaRPr>
+          </a:p>
+          <a:p>
+            <a:pPr eaLnBrk="0" fontAlgn="base" hangingPunct="0">
+              <a:spcBef>
+                <a:spcPct val="0"/>
+              </a:spcBef>
+              <a:spcAft>
+                <a:spcPct val="0"/>
+              </a:spcAft>
+              <a:buClrTx/>
+            </a:pPr>
+            <a:endParaRPr lang="en-US" altLang="en-US" dirty="0">
+              <a:solidFill>
+                <a:schemeClr val="accent1"/>
+              </a:solidFill>
+              <a:latin typeface="Fira Code"/>
+              <a:ea typeface="Fira Code"/>
+              <a:cs typeface="Fira Code"/>
+            </a:endParaRPr>
+          </a:p>
+          <a:p>
+            <a:pPr eaLnBrk="0" fontAlgn="base" hangingPunct="0">
+              <a:spcBef>
+                <a:spcPct val="0"/>
+              </a:spcBef>
+              <a:spcAft>
+                <a:spcPct val="0"/>
+              </a:spcAft>
+              <a:buClrTx/>
+            </a:pPr>
+            <a:r>
+              <a:rPr lang="en-US" altLang="en-US" dirty="0">
+                <a:solidFill>
+                  <a:schemeClr val="accent1"/>
+                </a:solidFill>
+                <a:latin typeface="Fira Code"/>
+                <a:ea typeface="Fira Code"/>
+                <a:cs typeface="Fira Code"/>
+              </a:rPr>
+              <a:t>You must implement the following functions:</a:t>
+            </a:r>
+            <a:endParaRPr lang="fa-IR" altLang="en-US" dirty="0">
+              <a:solidFill>
+                <a:schemeClr val="accent1"/>
+              </a:solidFill>
+              <a:latin typeface="Fira Code"/>
+              <a:ea typeface="Fira Code"/>
+              <a:cs typeface="Fira Code"/>
+            </a:endParaRPr>
+          </a:p>
+          <a:p>
+            <a:pPr eaLnBrk="0" fontAlgn="base" hangingPunct="0">
+              <a:spcBef>
+                <a:spcPct val="0"/>
+              </a:spcBef>
+              <a:spcAft>
+                <a:spcPct val="0"/>
+              </a:spcAft>
+              <a:buClrTx/>
+            </a:pPr>
+            <a:endParaRPr lang="en-US" altLang="en-US" dirty="0">
+              <a:solidFill>
+                <a:schemeClr val="accent1"/>
+              </a:solidFill>
+              <a:latin typeface="Fira Code"/>
+              <a:ea typeface="Fira Code"/>
+              <a:cs typeface="Fira Code"/>
+            </a:endParaRPr>
+          </a:p>
+          <a:p>
+            <a:pPr eaLnBrk="0" fontAlgn="base" hangingPunct="0">
+              <a:spcBef>
+                <a:spcPct val="0"/>
+              </a:spcBef>
+              <a:spcAft>
+                <a:spcPct val="0"/>
+              </a:spcAft>
+              <a:buClrTx/>
+            </a:pPr>
+            <a:r>
+              <a:rPr lang="en-US" altLang="en-US" dirty="0">
+                <a:solidFill>
+                  <a:schemeClr val="accent1"/>
+                </a:solidFill>
+                <a:latin typeface="Fira Code"/>
+                <a:ea typeface="Fira Code"/>
+                <a:cs typeface="Fira Code"/>
+              </a:rPr>
+              <a:t>int </a:t>
+            </a:r>
+            <a:r>
+              <a:rPr lang="en-US" altLang="en-US" b="1" dirty="0" err="1">
+                <a:solidFill>
+                  <a:schemeClr val="accent1"/>
+                </a:solidFill>
+                <a:latin typeface="Fira Code"/>
+                <a:ea typeface="Fira Code"/>
+                <a:cs typeface="Fira Code"/>
+              </a:rPr>
+              <a:t>isPrimeDigit</a:t>
+            </a:r>
+            <a:r>
+              <a:rPr lang="en-US" altLang="en-US" b="1" dirty="0">
+                <a:solidFill>
+                  <a:schemeClr val="accent1"/>
+                </a:solidFill>
+                <a:latin typeface="Fira Code"/>
+                <a:ea typeface="Fira Code"/>
+                <a:cs typeface="Fira Code"/>
+              </a:rPr>
+              <a:t>(int d); </a:t>
+            </a:r>
+            <a:r>
+              <a:rPr lang="en-US" altLang="en-US" dirty="0">
+                <a:solidFill>
+                  <a:schemeClr val="accent1"/>
+                </a:solidFill>
+                <a:latin typeface="Fira Code"/>
+                <a:ea typeface="Fira Code"/>
+                <a:cs typeface="Fira Code"/>
+              </a:rPr>
+              <a:t>– returns 1 if d is a prime digit, otherwise 0.</a:t>
+            </a:r>
+          </a:p>
+          <a:p>
+            <a:pPr eaLnBrk="0" fontAlgn="base" hangingPunct="0">
+              <a:spcBef>
+                <a:spcPct val="0"/>
+              </a:spcBef>
+              <a:spcAft>
+                <a:spcPct val="0"/>
+              </a:spcAft>
+              <a:buClrTx/>
+            </a:pPr>
+            <a:r>
+              <a:rPr lang="en-US" altLang="en-US" dirty="0">
+                <a:solidFill>
+                  <a:schemeClr val="accent1"/>
+                </a:solidFill>
+                <a:latin typeface="Fira Code"/>
+                <a:ea typeface="Fira Code"/>
+                <a:cs typeface="Fira Code"/>
+              </a:rPr>
+              <a:t>int </a:t>
+            </a:r>
+            <a:r>
+              <a:rPr lang="en-US" altLang="en-US" b="1" dirty="0" err="1">
+                <a:solidFill>
+                  <a:schemeClr val="accent1"/>
+                </a:solidFill>
+                <a:latin typeface="Fira Code"/>
+                <a:ea typeface="Fira Code"/>
+                <a:cs typeface="Fira Code"/>
+              </a:rPr>
+              <a:t>extractPrimeDigits</a:t>
+            </a:r>
+            <a:r>
+              <a:rPr lang="en-US" altLang="en-US" b="1" dirty="0">
+                <a:solidFill>
+                  <a:schemeClr val="accent1"/>
+                </a:solidFill>
+                <a:latin typeface="Fira Code"/>
+                <a:ea typeface="Fira Code"/>
+                <a:cs typeface="Fira Code"/>
+              </a:rPr>
+              <a:t>(int n); </a:t>
+            </a:r>
+            <a:r>
+              <a:rPr lang="en-US" altLang="en-US" dirty="0">
+                <a:solidFill>
+                  <a:schemeClr val="accent1"/>
+                </a:solidFill>
+                <a:latin typeface="Fira Code"/>
+                <a:ea typeface="Fira Code"/>
+                <a:cs typeface="Fira Code"/>
+              </a:rPr>
+              <a:t>– returns the new number made only of prime digits, in correct order.</a:t>
+            </a:r>
+          </a:p>
+          <a:p>
+            <a:pPr eaLnBrk="0" fontAlgn="base" hangingPunct="0">
+              <a:spcBef>
+                <a:spcPct val="0"/>
+              </a:spcBef>
+              <a:spcAft>
+                <a:spcPct val="0"/>
+              </a:spcAft>
+              <a:buClrTx/>
+            </a:pPr>
+            <a:r>
+              <a:rPr lang="en-US" altLang="en-US" dirty="0">
+                <a:solidFill>
+                  <a:schemeClr val="accent1"/>
+                </a:solidFill>
+                <a:latin typeface="Fira Code"/>
+                <a:ea typeface="Fira Code"/>
+                <a:cs typeface="Fira Code"/>
+              </a:rPr>
+              <a:t>int </a:t>
+            </a:r>
+            <a:r>
+              <a:rPr lang="en-US" altLang="en-US" b="1" dirty="0" err="1">
+                <a:solidFill>
+                  <a:schemeClr val="accent1"/>
+                </a:solidFill>
+                <a:latin typeface="Fira Code"/>
+                <a:ea typeface="Fira Code"/>
+                <a:cs typeface="Fira Code"/>
+              </a:rPr>
+              <a:t>sumDigitsRecursive</a:t>
+            </a:r>
+            <a:r>
+              <a:rPr lang="en-US" altLang="en-US" b="1" dirty="0">
+                <a:solidFill>
+                  <a:schemeClr val="accent1"/>
+                </a:solidFill>
+                <a:latin typeface="Fira Code"/>
+                <a:ea typeface="Fira Code"/>
+                <a:cs typeface="Fira Code"/>
+              </a:rPr>
+              <a:t>(int n); </a:t>
+            </a:r>
+            <a:r>
+              <a:rPr lang="en-US" altLang="en-US" dirty="0">
+                <a:solidFill>
+                  <a:schemeClr val="accent1"/>
+                </a:solidFill>
+                <a:latin typeface="Fira Code"/>
+                <a:ea typeface="Fira Code"/>
+                <a:cs typeface="Fira Code"/>
+              </a:rPr>
+              <a:t>– returns the sum of digits of a number recursively.</a:t>
+            </a:r>
+          </a:p>
+          <a:p>
+            <a:pPr lvl="0" eaLnBrk="0" fontAlgn="base" hangingPunct="0">
+              <a:spcBef>
+                <a:spcPct val="0"/>
+              </a:spcBef>
+              <a:spcAft>
+                <a:spcPct val="0"/>
+              </a:spcAft>
+              <a:buClrTx/>
+            </a:pPr>
+            <a:endParaRPr lang="en-US" altLang="en-US" dirty="0">
+              <a:solidFill>
+                <a:schemeClr val="accent1"/>
+              </a:solidFill>
+              <a:latin typeface="Arial" panose="020B0604020202020204" pitchFamily="34" charset="0"/>
+            </a:endParaRPr>
+          </a:p>
+        </p:txBody>
+      </p:sp>
+      <p:sp>
+        <p:nvSpPr>
+          <p:cNvPr id="4" name="Google Shape;475;p28">
+            <a:extLst>
+              <a:ext uri="{FF2B5EF4-FFF2-40B4-BE49-F238E27FC236}">
+                <a16:creationId xmlns:a16="http://schemas.microsoft.com/office/drawing/2014/main" id="{449D09DA-D8D3-7117-B50A-609A5BD2C3E1}"/>
+              </a:ext>
+            </a:extLst>
+          </p:cNvPr>
+          <p:cNvSpPr txBox="1">
+            <a:spLocks/>
+          </p:cNvSpPr>
+          <p:nvPr/>
+        </p:nvSpPr>
+        <p:spPr>
+          <a:xfrm>
+            <a:off x="4572000" y="91525"/>
+            <a:ext cx="4572000" cy="357300"/>
+          </a:xfrm>
+          <a:prstGeom prst="rect">
+            <a:avLst/>
+          </a:prstGeom>
+          <a:noFill/>
+          <a:ln>
+            <a:noFill/>
+          </a:ln>
+        </p:spPr>
+        <p:txBody>
+          <a:bodyPr spcFirstLastPara="1" wrap="square" lIns="91425" tIns="91425" rIns="91425" bIns="91425" anchor="ctr" anchorCtr="0">
+            <a:noAutofit/>
+          </a:bodyPr>
+          <a:lstStyle>
+            <a:defPPr marR="0" lvl="0" algn="l" rtl="0">
+              <a:lnSpc>
+                <a:spcPct val="100000"/>
+              </a:lnSpc>
+              <a:spcBef>
+                <a:spcPts val="0"/>
+              </a:spcBef>
+              <a:spcAft>
+                <a:spcPts val="0"/>
+              </a:spcAft>
+            </a:defPPr>
+            <a:lvl1pPr marL="457200" marR="0" lvl="0" indent="-317500" algn="l" rtl="0">
+              <a:lnSpc>
+                <a:spcPct val="100000"/>
+              </a:lnSpc>
+              <a:spcBef>
+                <a:spcPts val="0"/>
+              </a:spcBef>
+              <a:spcAft>
+                <a:spcPts val="0"/>
+              </a:spcAft>
+              <a:buClr>
+                <a:schemeClr val="dk2"/>
+              </a:buClr>
+              <a:buSzPts val="1400"/>
+              <a:buFont typeface="Fira Code"/>
+              <a:buChar char="●"/>
+              <a:defRPr sz="1400" b="0" i="0" u="none" strike="noStrike" cap="none">
+                <a:solidFill>
+                  <a:schemeClr val="dk2"/>
+                </a:solidFill>
+                <a:latin typeface="Fira Code"/>
+                <a:ea typeface="Fira Code"/>
+                <a:cs typeface="Fira Code"/>
+                <a:sym typeface="Fira Code"/>
+              </a:defRPr>
+            </a:lvl1pPr>
+            <a:lvl2pPr marL="914400" marR="0" lvl="1" indent="-317500" algn="l" rtl="0">
+              <a:lnSpc>
+                <a:spcPct val="100000"/>
+              </a:lnSpc>
+              <a:spcBef>
+                <a:spcPts val="0"/>
+              </a:spcBef>
+              <a:spcAft>
+                <a:spcPts val="0"/>
+              </a:spcAft>
+              <a:buClr>
+                <a:schemeClr val="dk2"/>
+              </a:buClr>
+              <a:buSzPts val="1400"/>
+              <a:buFont typeface="Fira Code"/>
+              <a:buChar char="○"/>
+              <a:defRPr sz="1400" b="0" i="0" u="none" strike="noStrike" cap="none">
+                <a:solidFill>
+                  <a:schemeClr val="dk2"/>
+                </a:solidFill>
+                <a:latin typeface="Fira Code"/>
+                <a:ea typeface="Fira Code"/>
+                <a:cs typeface="Fira Code"/>
+                <a:sym typeface="Fira Code"/>
+              </a:defRPr>
+            </a:lvl2pPr>
+            <a:lvl3pPr marL="1371600" marR="0" lvl="2" indent="-317500" algn="l" rtl="0">
+              <a:lnSpc>
+                <a:spcPct val="100000"/>
+              </a:lnSpc>
+              <a:spcBef>
+                <a:spcPts val="0"/>
+              </a:spcBef>
+              <a:spcAft>
+                <a:spcPts val="0"/>
+              </a:spcAft>
+              <a:buClr>
+                <a:schemeClr val="dk2"/>
+              </a:buClr>
+              <a:buSzPts val="1400"/>
+              <a:buFont typeface="Fira Code"/>
+              <a:buChar char="■"/>
+              <a:defRPr sz="1400" b="0" i="0" u="none" strike="noStrike" cap="none">
+                <a:solidFill>
+                  <a:schemeClr val="dk2"/>
+                </a:solidFill>
+                <a:latin typeface="Fira Code"/>
+                <a:ea typeface="Fira Code"/>
+                <a:cs typeface="Fira Code"/>
+                <a:sym typeface="Fira Code"/>
+              </a:defRPr>
+            </a:lvl3pPr>
+            <a:lvl4pPr marL="1828800" marR="0" lvl="3" indent="-317500" algn="l" rtl="0">
+              <a:lnSpc>
+                <a:spcPct val="100000"/>
+              </a:lnSpc>
+              <a:spcBef>
+                <a:spcPts val="0"/>
+              </a:spcBef>
+              <a:spcAft>
+                <a:spcPts val="0"/>
+              </a:spcAft>
+              <a:buClr>
+                <a:schemeClr val="dk2"/>
+              </a:buClr>
+              <a:buSzPts val="1400"/>
+              <a:buFont typeface="Fira Code"/>
+              <a:buChar char="●"/>
+              <a:defRPr sz="1400" b="0" i="0" u="none" strike="noStrike" cap="none">
+                <a:solidFill>
+                  <a:schemeClr val="dk2"/>
+                </a:solidFill>
+                <a:latin typeface="Fira Code"/>
+                <a:ea typeface="Fira Code"/>
+                <a:cs typeface="Fira Code"/>
+                <a:sym typeface="Fira Code"/>
+              </a:defRPr>
+            </a:lvl4pPr>
+            <a:lvl5pPr marL="2286000" marR="0" lvl="4" indent="-317500" algn="l" rtl="0">
+              <a:lnSpc>
+                <a:spcPct val="100000"/>
+              </a:lnSpc>
+              <a:spcBef>
+                <a:spcPts val="0"/>
+              </a:spcBef>
+              <a:spcAft>
+                <a:spcPts val="0"/>
+              </a:spcAft>
+              <a:buClr>
+                <a:schemeClr val="dk2"/>
+              </a:buClr>
+              <a:buSzPts val="1400"/>
+              <a:buFont typeface="Fira Code"/>
+              <a:buChar char="○"/>
+              <a:defRPr sz="1400" b="0" i="0" u="none" strike="noStrike" cap="none">
+                <a:solidFill>
+                  <a:schemeClr val="dk2"/>
+                </a:solidFill>
+                <a:latin typeface="Fira Code"/>
+                <a:ea typeface="Fira Code"/>
+                <a:cs typeface="Fira Code"/>
+                <a:sym typeface="Fira Code"/>
+              </a:defRPr>
+            </a:lvl5pPr>
+            <a:lvl6pPr marL="2743200" marR="0" lvl="5" indent="-317500" algn="l" rtl="0">
+              <a:lnSpc>
+                <a:spcPct val="100000"/>
+              </a:lnSpc>
+              <a:spcBef>
+                <a:spcPts val="0"/>
+              </a:spcBef>
+              <a:spcAft>
+                <a:spcPts val="0"/>
+              </a:spcAft>
+              <a:buClr>
+                <a:schemeClr val="dk2"/>
+              </a:buClr>
+              <a:buSzPts val="1400"/>
+              <a:buFont typeface="Fira Code"/>
+              <a:buChar char="■"/>
+              <a:defRPr sz="1400" b="0" i="0" u="none" strike="noStrike" cap="none">
+                <a:solidFill>
+                  <a:schemeClr val="dk2"/>
+                </a:solidFill>
+                <a:latin typeface="Fira Code"/>
+                <a:ea typeface="Fira Code"/>
+                <a:cs typeface="Fira Code"/>
+                <a:sym typeface="Fira Code"/>
+              </a:defRPr>
+            </a:lvl6pPr>
+            <a:lvl7pPr marL="3200400" marR="0" lvl="6" indent="-317500" algn="l" rtl="0">
+              <a:lnSpc>
+                <a:spcPct val="100000"/>
+              </a:lnSpc>
+              <a:spcBef>
+                <a:spcPts val="0"/>
+              </a:spcBef>
+              <a:spcAft>
+                <a:spcPts val="0"/>
+              </a:spcAft>
+              <a:buClr>
+                <a:schemeClr val="dk2"/>
+              </a:buClr>
+              <a:buSzPts val="1400"/>
+              <a:buFont typeface="Fira Code"/>
+              <a:buChar char="●"/>
+              <a:defRPr sz="1400" b="0" i="0" u="none" strike="noStrike" cap="none">
+                <a:solidFill>
+                  <a:schemeClr val="dk2"/>
+                </a:solidFill>
+                <a:latin typeface="Fira Code"/>
+                <a:ea typeface="Fira Code"/>
+                <a:cs typeface="Fira Code"/>
+                <a:sym typeface="Fira Code"/>
+              </a:defRPr>
+            </a:lvl7pPr>
+            <a:lvl8pPr marL="3657600" marR="0" lvl="7" indent="-317500" algn="l" rtl="0">
+              <a:lnSpc>
+                <a:spcPct val="100000"/>
+              </a:lnSpc>
+              <a:spcBef>
+                <a:spcPts val="0"/>
+              </a:spcBef>
+              <a:spcAft>
+                <a:spcPts val="0"/>
+              </a:spcAft>
+              <a:buClr>
+                <a:schemeClr val="dk2"/>
+              </a:buClr>
+              <a:buSzPts val="1400"/>
+              <a:buFont typeface="Fira Code"/>
+              <a:buChar char="○"/>
+              <a:defRPr sz="1400" b="0" i="0" u="none" strike="noStrike" cap="none">
+                <a:solidFill>
+                  <a:schemeClr val="dk2"/>
+                </a:solidFill>
+                <a:latin typeface="Fira Code"/>
+                <a:ea typeface="Fira Code"/>
+                <a:cs typeface="Fira Code"/>
+                <a:sym typeface="Fira Code"/>
+              </a:defRPr>
+            </a:lvl8pPr>
+            <a:lvl9pPr marL="4114800" marR="0" lvl="8" indent="-317500" algn="l" rtl="0">
+              <a:lnSpc>
+                <a:spcPct val="100000"/>
+              </a:lnSpc>
+              <a:spcBef>
+                <a:spcPts val="0"/>
+              </a:spcBef>
+              <a:spcAft>
+                <a:spcPts val="0"/>
+              </a:spcAft>
+              <a:buClr>
+                <a:schemeClr val="dk2"/>
+              </a:buClr>
+              <a:buSzPts val="1400"/>
+              <a:buFont typeface="Fira Code"/>
+              <a:buChar char="■"/>
+              <a:defRPr sz="1400" b="0" i="0" u="none" strike="noStrike" cap="none">
+                <a:solidFill>
+                  <a:schemeClr val="dk2"/>
+                </a:solidFill>
+                <a:latin typeface="Fira Code"/>
+                <a:ea typeface="Fira Code"/>
+                <a:cs typeface="Fira Code"/>
+                <a:sym typeface="Fira Code"/>
+              </a:defRPr>
+            </a:lvl9pPr>
+          </a:lstStyle>
+          <a:p>
+            <a:pPr marL="0" indent="0" algn="ctr">
+              <a:buFont typeface="Fira Code"/>
+              <a:buNone/>
+            </a:pPr>
+            <a:r>
+              <a:rPr lang="en-US" dirty="0">
+                <a:solidFill>
+                  <a:schemeClr val="accent3"/>
+                </a:solidFill>
+              </a:rPr>
+              <a:t>HW2</a:t>
+            </a:r>
+          </a:p>
+        </p:txBody>
+      </p:sp>
+      <p:sp>
+        <p:nvSpPr>
+          <p:cNvPr id="3" name="Google Shape;473;p28">
+            <a:extLst>
+              <a:ext uri="{FF2B5EF4-FFF2-40B4-BE49-F238E27FC236}">
+                <a16:creationId xmlns:a16="http://schemas.microsoft.com/office/drawing/2014/main" id="{6652BE5C-F5F9-6266-232E-BAA3388F5C2B}"/>
+              </a:ext>
+            </a:extLst>
+          </p:cNvPr>
+          <p:cNvSpPr txBox="1">
+            <a:spLocks/>
+          </p:cNvSpPr>
+          <p:nvPr/>
+        </p:nvSpPr>
+        <p:spPr>
+          <a:xfrm>
+            <a:off x="710125" y="4694725"/>
+            <a:ext cx="4865100" cy="357300"/>
+          </a:xfrm>
+          <a:prstGeom prst="rect">
+            <a:avLst/>
+          </a:prstGeom>
+          <a:noFill/>
+          <a:ln>
+            <a:noFill/>
+          </a:ln>
+        </p:spPr>
+        <p:txBody>
+          <a:bodyPr spcFirstLastPara="1" wrap="square" lIns="91425" tIns="91425" rIns="91425" bIns="91425" anchor="ctr" anchorCtr="0">
+            <a:noAutofit/>
+          </a:bodyPr>
+          <a:lstStyle>
+            <a:defPPr marR="0" lvl="0" algn="l" rtl="0">
+              <a:lnSpc>
+                <a:spcPct val="100000"/>
+              </a:lnSpc>
+              <a:spcBef>
+                <a:spcPts val="0"/>
+              </a:spcBef>
+              <a:spcAft>
+                <a:spcPts val="0"/>
+              </a:spcAft>
+            </a:defPPr>
+            <a:lvl1pPr marL="457200" marR="0" lvl="0" indent="-317500" algn="l" rtl="0">
+              <a:lnSpc>
+                <a:spcPct val="100000"/>
+              </a:lnSpc>
+              <a:spcBef>
+                <a:spcPts val="0"/>
+              </a:spcBef>
+              <a:spcAft>
+                <a:spcPts val="0"/>
+              </a:spcAft>
+              <a:buClr>
+                <a:schemeClr val="dk2"/>
+              </a:buClr>
+              <a:buSzPts val="1400"/>
+              <a:buFont typeface="Fira Code"/>
+              <a:buChar char="●"/>
+              <a:defRPr sz="1400" b="0" i="0" u="none" strike="noStrike" cap="none">
+                <a:solidFill>
+                  <a:schemeClr val="dk2"/>
+                </a:solidFill>
+                <a:latin typeface="Fira Code"/>
+                <a:ea typeface="Fira Code"/>
+                <a:cs typeface="Fira Code"/>
+                <a:sym typeface="Fira Code"/>
+              </a:defRPr>
+            </a:lvl1pPr>
+            <a:lvl2pPr marL="914400" marR="0" lvl="1" indent="-317500" algn="l" rtl="0">
+              <a:lnSpc>
+                <a:spcPct val="100000"/>
+              </a:lnSpc>
+              <a:spcBef>
+                <a:spcPts val="0"/>
+              </a:spcBef>
+              <a:spcAft>
+                <a:spcPts val="0"/>
+              </a:spcAft>
+              <a:buClr>
+                <a:schemeClr val="dk2"/>
+              </a:buClr>
+              <a:buSzPts val="1400"/>
+              <a:buFont typeface="Fira Code"/>
+              <a:buChar char="○"/>
+              <a:defRPr sz="1400" b="0" i="0" u="none" strike="noStrike" cap="none">
+                <a:solidFill>
+                  <a:schemeClr val="dk2"/>
+                </a:solidFill>
+                <a:latin typeface="Fira Code"/>
+                <a:ea typeface="Fira Code"/>
+                <a:cs typeface="Fira Code"/>
+                <a:sym typeface="Fira Code"/>
+              </a:defRPr>
+            </a:lvl2pPr>
+            <a:lvl3pPr marL="1371600" marR="0" lvl="2" indent="-317500" algn="l" rtl="0">
+              <a:lnSpc>
+                <a:spcPct val="100000"/>
+              </a:lnSpc>
+              <a:spcBef>
+                <a:spcPts val="0"/>
+              </a:spcBef>
+              <a:spcAft>
+                <a:spcPts val="0"/>
+              </a:spcAft>
+              <a:buClr>
+                <a:schemeClr val="dk2"/>
+              </a:buClr>
+              <a:buSzPts val="1400"/>
+              <a:buFont typeface="Fira Code"/>
+              <a:buChar char="■"/>
+              <a:defRPr sz="1400" b="0" i="0" u="none" strike="noStrike" cap="none">
+                <a:solidFill>
+                  <a:schemeClr val="dk2"/>
+                </a:solidFill>
+                <a:latin typeface="Fira Code"/>
+                <a:ea typeface="Fira Code"/>
+                <a:cs typeface="Fira Code"/>
+                <a:sym typeface="Fira Code"/>
+              </a:defRPr>
+            </a:lvl3pPr>
+            <a:lvl4pPr marL="1828800" marR="0" lvl="3" indent="-317500" algn="l" rtl="0">
+              <a:lnSpc>
+                <a:spcPct val="100000"/>
+              </a:lnSpc>
+              <a:spcBef>
+                <a:spcPts val="0"/>
+              </a:spcBef>
+              <a:spcAft>
+                <a:spcPts val="0"/>
+              </a:spcAft>
+              <a:buClr>
+                <a:schemeClr val="dk2"/>
+              </a:buClr>
+              <a:buSzPts val="1400"/>
+              <a:buFont typeface="Fira Code"/>
+              <a:buChar char="●"/>
+              <a:defRPr sz="1400" b="0" i="0" u="none" strike="noStrike" cap="none">
+                <a:solidFill>
+                  <a:schemeClr val="dk2"/>
+                </a:solidFill>
+                <a:latin typeface="Fira Code"/>
+                <a:ea typeface="Fira Code"/>
+                <a:cs typeface="Fira Code"/>
+                <a:sym typeface="Fira Code"/>
+              </a:defRPr>
+            </a:lvl4pPr>
+            <a:lvl5pPr marL="2286000" marR="0" lvl="4" indent="-317500" algn="l" rtl="0">
+              <a:lnSpc>
+                <a:spcPct val="100000"/>
+              </a:lnSpc>
+              <a:spcBef>
+                <a:spcPts val="0"/>
+              </a:spcBef>
+              <a:spcAft>
+                <a:spcPts val="0"/>
+              </a:spcAft>
+              <a:buClr>
+                <a:schemeClr val="dk2"/>
+              </a:buClr>
+              <a:buSzPts val="1400"/>
+              <a:buFont typeface="Fira Code"/>
+              <a:buChar char="○"/>
+              <a:defRPr sz="1400" b="0" i="0" u="none" strike="noStrike" cap="none">
+                <a:solidFill>
+                  <a:schemeClr val="dk2"/>
+                </a:solidFill>
+                <a:latin typeface="Fira Code"/>
+                <a:ea typeface="Fira Code"/>
+                <a:cs typeface="Fira Code"/>
+                <a:sym typeface="Fira Code"/>
+              </a:defRPr>
+            </a:lvl5pPr>
+            <a:lvl6pPr marL="2743200" marR="0" lvl="5" indent="-317500" algn="l" rtl="0">
+              <a:lnSpc>
+                <a:spcPct val="100000"/>
+              </a:lnSpc>
+              <a:spcBef>
+                <a:spcPts val="0"/>
+              </a:spcBef>
+              <a:spcAft>
+                <a:spcPts val="0"/>
+              </a:spcAft>
+              <a:buClr>
+                <a:schemeClr val="dk2"/>
+              </a:buClr>
+              <a:buSzPts val="1400"/>
+              <a:buFont typeface="Fira Code"/>
+              <a:buChar char="■"/>
+              <a:defRPr sz="1400" b="0" i="0" u="none" strike="noStrike" cap="none">
+                <a:solidFill>
+                  <a:schemeClr val="dk2"/>
+                </a:solidFill>
+                <a:latin typeface="Fira Code"/>
+                <a:ea typeface="Fira Code"/>
+                <a:cs typeface="Fira Code"/>
+                <a:sym typeface="Fira Code"/>
+              </a:defRPr>
+            </a:lvl6pPr>
+            <a:lvl7pPr marL="3200400" marR="0" lvl="6" indent="-317500" algn="l" rtl="0">
+              <a:lnSpc>
+                <a:spcPct val="100000"/>
+              </a:lnSpc>
+              <a:spcBef>
+                <a:spcPts val="0"/>
+              </a:spcBef>
+              <a:spcAft>
+                <a:spcPts val="0"/>
+              </a:spcAft>
+              <a:buClr>
+                <a:schemeClr val="dk2"/>
+              </a:buClr>
+              <a:buSzPts val="1400"/>
+              <a:buFont typeface="Fira Code"/>
+              <a:buChar char="●"/>
+              <a:defRPr sz="1400" b="0" i="0" u="none" strike="noStrike" cap="none">
+                <a:solidFill>
+                  <a:schemeClr val="dk2"/>
+                </a:solidFill>
+                <a:latin typeface="Fira Code"/>
+                <a:ea typeface="Fira Code"/>
+                <a:cs typeface="Fira Code"/>
+                <a:sym typeface="Fira Code"/>
+              </a:defRPr>
+            </a:lvl7pPr>
+            <a:lvl8pPr marL="3657600" marR="0" lvl="7" indent="-317500" algn="l" rtl="0">
+              <a:lnSpc>
+                <a:spcPct val="100000"/>
+              </a:lnSpc>
+              <a:spcBef>
+                <a:spcPts val="0"/>
+              </a:spcBef>
+              <a:spcAft>
+                <a:spcPts val="0"/>
+              </a:spcAft>
+              <a:buClr>
+                <a:schemeClr val="dk2"/>
+              </a:buClr>
+              <a:buSzPts val="1400"/>
+              <a:buFont typeface="Fira Code"/>
+              <a:buChar char="○"/>
+              <a:defRPr sz="1400" b="0" i="0" u="none" strike="noStrike" cap="none">
+                <a:solidFill>
+                  <a:schemeClr val="dk2"/>
+                </a:solidFill>
+                <a:latin typeface="Fira Code"/>
+                <a:ea typeface="Fira Code"/>
+                <a:cs typeface="Fira Code"/>
+                <a:sym typeface="Fira Code"/>
+              </a:defRPr>
+            </a:lvl8pPr>
+            <a:lvl9pPr marL="4114800" marR="0" lvl="8" indent="-317500" algn="l" rtl="0">
+              <a:lnSpc>
+                <a:spcPct val="100000"/>
+              </a:lnSpc>
+              <a:spcBef>
+                <a:spcPts val="0"/>
+              </a:spcBef>
+              <a:spcAft>
+                <a:spcPts val="0"/>
+              </a:spcAft>
+              <a:buClr>
+                <a:schemeClr val="dk2"/>
+              </a:buClr>
+              <a:buSzPts val="1400"/>
+              <a:buFont typeface="Fira Code"/>
+              <a:buChar char="■"/>
+              <a:defRPr sz="1400" b="0" i="0" u="none" strike="noStrike" cap="none">
+                <a:solidFill>
+                  <a:schemeClr val="dk2"/>
+                </a:solidFill>
+                <a:latin typeface="Fira Code"/>
+                <a:ea typeface="Fira Code"/>
+                <a:cs typeface="Fira Code"/>
+                <a:sym typeface="Fira Code"/>
+              </a:defRPr>
+            </a:lvl9pPr>
+          </a:lstStyle>
+          <a:p>
+            <a:pPr marL="0" indent="0">
+              <a:buFont typeface="Fira Code"/>
+              <a:buNone/>
+            </a:pPr>
+            <a:r>
+              <a:rPr lang="en-US">
+                <a:solidFill>
+                  <a:schemeClr val="accent3"/>
+                </a:solidFill>
+              </a:rPr>
+              <a:t>Programming Language Lab</a:t>
+            </a:r>
+            <a:endParaRPr lang="en-US" dirty="0">
+              <a:solidFill>
+                <a:schemeClr val="accent3"/>
+              </a:solidFill>
+            </a:endParaRPr>
+          </a:p>
+        </p:txBody>
+      </p:sp>
+      <p:sp>
+        <p:nvSpPr>
+          <p:cNvPr id="5" name="Google Shape;473;p28">
+            <a:extLst>
+              <a:ext uri="{FF2B5EF4-FFF2-40B4-BE49-F238E27FC236}">
+                <a16:creationId xmlns:a16="http://schemas.microsoft.com/office/drawing/2014/main" id="{C6CB9724-E4F3-5CD3-B16E-E58FE3B3FA2C}"/>
+              </a:ext>
+            </a:extLst>
+          </p:cNvPr>
+          <p:cNvSpPr txBox="1">
+            <a:spLocks/>
+          </p:cNvSpPr>
+          <p:nvPr/>
+        </p:nvSpPr>
+        <p:spPr>
+          <a:xfrm>
+            <a:off x="8433851" y="4694675"/>
+            <a:ext cx="391312" cy="357300"/>
+          </a:xfrm>
+          <a:prstGeom prst="rect">
+            <a:avLst/>
+          </a:prstGeom>
+          <a:noFill/>
+          <a:ln>
+            <a:noFill/>
+          </a:ln>
+        </p:spPr>
+        <p:txBody>
+          <a:bodyPr spcFirstLastPara="1" wrap="square" lIns="91425" tIns="91425" rIns="91425" bIns="91425" anchor="ctr" anchorCtr="0">
+            <a:noAutofit/>
+          </a:bodyPr>
+          <a:lstStyle>
+            <a:defPPr marR="0" lvl="0" algn="l" rtl="0">
+              <a:lnSpc>
+                <a:spcPct val="100000"/>
+              </a:lnSpc>
+              <a:spcBef>
+                <a:spcPts val="0"/>
+              </a:spcBef>
+              <a:spcAft>
+                <a:spcPts val="0"/>
+              </a:spcAft>
+            </a:defPPr>
+            <a:lvl1pPr marL="457200" marR="0" lvl="0" indent="-317500" algn="l" rtl="0">
+              <a:lnSpc>
+                <a:spcPct val="100000"/>
+              </a:lnSpc>
+              <a:spcBef>
+                <a:spcPts val="0"/>
+              </a:spcBef>
+              <a:spcAft>
+                <a:spcPts val="0"/>
+              </a:spcAft>
+              <a:buClr>
+                <a:schemeClr val="dk2"/>
+              </a:buClr>
+              <a:buSzPts val="1400"/>
+              <a:buFont typeface="Fira Code"/>
+              <a:buChar char="●"/>
+              <a:defRPr sz="1400" b="0" i="0" u="none" strike="noStrike" cap="none">
+                <a:solidFill>
+                  <a:schemeClr val="dk2"/>
+                </a:solidFill>
+                <a:latin typeface="Fira Code"/>
+                <a:ea typeface="Fira Code"/>
+                <a:cs typeface="Fira Code"/>
+                <a:sym typeface="Fira Code"/>
+              </a:defRPr>
+            </a:lvl1pPr>
+            <a:lvl2pPr marL="914400" marR="0" lvl="1" indent="-317500" algn="l" rtl="0">
+              <a:lnSpc>
+                <a:spcPct val="100000"/>
+              </a:lnSpc>
+              <a:spcBef>
+                <a:spcPts val="0"/>
+              </a:spcBef>
+              <a:spcAft>
+                <a:spcPts val="0"/>
+              </a:spcAft>
+              <a:buClr>
+                <a:schemeClr val="dk2"/>
+              </a:buClr>
+              <a:buSzPts val="1400"/>
+              <a:buFont typeface="Fira Code"/>
+              <a:buChar char="○"/>
+              <a:defRPr sz="1400" b="0" i="0" u="none" strike="noStrike" cap="none">
+                <a:solidFill>
+                  <a:schemeClr val="dk2"/>
+                </a:solidFill>
+                <a:latin typeface="Fira Code"/>
+                <a:ea typeface="Fira Code"/>
+                <a:cs typeface="Fira Code"/>
+                <a:sym typeface="Fira Code"/>
+              </a:defRPr>
+            </a:lvl2pPr>
+            <a:lvl3pPr marL="1371600" marR="0" lvl="2" indent="-317500" algn="l" rtl="0">
+              <a:lnSpc>
+                <a:spcPct val="100000"/>
+              </a:lnSpc>
+              <a:spcBef>
+                <a:spcPts val="0"/>
+              </a:spcBef>
+              <a:spcAft>
+                <a:spcPts val="0"/>
+              </a:spcAft>
+              <a:buClr>
+                <a:schemeClr val="dk2"/>
+              </a:buClr>
+              <a:buSzPts val="1400"/>
+              <a:buFont typeface="Fira Code"/>
+              <a:buChar char="■"/>
+              <a:defRPr sz="1400" b="0" i="0" u="none" strike="noStrike" cap="none">
+                <a:solidFill>
+                  <a:schemeClr val="dk2"/>
+                </a:solidFill>
+                <a:latin typeface="Fira Code"/>
+                <a:ea typeface="Fira Code"/>
+                <a:cs typeface="Fira Code"/>
+                <a:sym typeface="Fira Code"/>
+              </a:defRPr>
+            </a:lvl3pPr>
+            <a:lvl4pPr marL="1828800" marR="0" lvl="3" indent="-317500" algn="l" rtl="0">
+              <a:lnSpc>
+                <a:spcPct val="100000"/>
+              </a:lnSpc>
+              <a:spcBef>
+                <a:spcPts val="0"/>
+              </a:spcBef>
+              <a:spcAft>
+                <a:spcPts val="0"/>
+              </a:spcAft>
+              <a:buClr>
+                <a:schemeClr val="dk2"/>
+              </a:buClr>
+              <a:buSzPts val="1400"/>
+              <a:buFont typeface="Fira Code"/>
+              <a:buChar char="●"/>
+              <a:defRPr sz="1400" b="0" i="0" u="none" strike="noStrike" cap="none">
+                <a:solidFill>
+                  <a:schemeClr val="dk2"/>
+                </a:solidFill>
+                <a:latin typeface="Fira Code"/>
+                <a:ea typeface="Fira Code"/>
+                <a:cs typeface="Fira Code"/>
+                <a:sym typeface="Fira Code"/>
+              </a:defRPr>
+            </a:lvl4pPr>
+            <a:lvl5pPr marL="2286000" marR="0" lvl="4" indent="-317500" algn="l" rtl="0">
+              <a:lnSpc>
+                <a:spcPct val="100000"/>
+              </a:lnSpc>
+              <a:spcBef>
+                <a:spcPts val="0"/>
+              </a:spcBef>
+              <a:spcAft>
+                <a:spcPts val="0"/>
+              </a:spcAft>
+              <a:buClr>
+                <a:schemeClr val="dk2"/>
+              </a:buClr>
+              <a:buSzPts val="1400"/>
+              <a:buFont typeface="Fira Code"/>
+              <a:buChar char="○"/>
+              <a:defRPr sz="1400" b="0" i="0" u="none" strike="noStrike" cap="none">
+                <a:solidFill>
+                  <a:schemeClr val="dk2"/>
+                </a:solidFill>
+                <a:latin typeface="Fira Code"/>
+                <a:ea typeface="Fira Code"/>
+                <a:cs typeface="Fira Code"/>
+                <a:sym typeface="Fira Code"/>
+              </a:defRPr>
+            </a:lvl5pPr>
+            <a:lvl6pPr marL="2743200" marR="0" lvl="5" indent="-317500" algn="l" rtl="0">
+              <a:lnSpc>
+                <a:spcPct val="100000"/>
+              </a:lnSpc>
+              <a:spcBef>
+                <a:spcPts val="0"/>
+              </a:spcBef>
+              <a:spcAft>
+                <a:spcPts val="0"/>
+              </a:spcAft>
+              <a:buClr>
+                <a:schemeClr val="dk2"/>
+              </a:buClr>
+              <a:buSzPts val="1400"/>
+              <a:buFont typeface="Fira Code"/>
+              <a:buChar char="■"/>
+              <a:defRPr sz="1400" b="0" i="0" u="none" strike="noStrike" cap="none">
+                <a:solidFill>
+                  <a:schemeClr val="dk2"/>
+                </a:solidFill>
+                <a:latin typeface="Fira Code"/>
+                <a:ea typeface="Fira Code"/>
+                <a:cs typeface="Fira Code"/>
+                <a:sym typeface="Fira Code"/>
+              </a:defRPr>
+            </a:lvl6pPr>
+            <a:lvl7pPr marL="3200400" marR="0" lvl="6" indent="-317500" algn="l" rtl="0">
+              <a:lnSpc>
+                <a:spcPct val="100000"/>
+              </a:lnSpc>
+              <a:spcBef>
+                <a:spcPts val="0"/>
+              </a:spcBef>
+              <a:spcAft>
+                <a:spcPts val="0"/>
+              </a:spcAft>
+              <a:buClr>
+                <a:schemeClr val="dk2"/>
+              </a:buClr>
+              <a:buSzPts val="1400"/>
+              <a:buFont typeface="Fira Code"/>
+              <a:buChar char="●"/>
+              <a:defRPr sz="1400" b="0" i="0" u="none" strike="noStrike" cap="none">
+                <a:solidFill>
+                  <a:schemeClr val="dk2"/>
+                </a:solidFill>
+                <a:latin typeface="Fira Code"/>
+                <a:ea typeface="Fira Code"/>
+                <a:cs typeface="Fira Code"/>
+                <a:sym typeface="Fira Code"/>
+              </a:defRPr>
+            </a:lvl7pPr>
+            <a:lvl8pPr marL="3657600" marR="0" lvl="7" indent="-317500" algn="l" rtl="0">
+              <a:lnSpc>
+                <a:spcPct val="100000"/>
+              </a:lnSpc>
+              <a:spcBef>
+                <a:spcPts val="0"/>
+              </a:spcBef>
+              <a:spcAft>
+                <a:spcPts val="0"/>
+              </a:spcAft>
+              <a:buClr>
+                <a:schemeClr val="dk2"/>
+              </a:buClr>
+              <a:buSzPts val="1400"/>
+              <a:buFont typeface="Fira Code"/>
+              <a:buChar char="○"/>
+              <a:defRPr sz="1400" b="0" i="0" u="none" strike="noStrike" cap="none">
+                <a:solidFill>
+                  <a:schemeClr val="dk2"/>
+                </a:solidFill>
+                <a:latin typeface="Fira Code"/>
+                <a:ea typeface="Fira Code"/>
+                <a:cs typeface="Fira Code"/>
+                <a:sym typeface="Fira Code"/>
+              </a:defRPr>
+            </a:lvl8pPr>
+            <a:lvl9pPr marL="4114800" marR="0" lvl="8" indent="-317500" algn="l" rtl="0">
+              <a:lnSpc>
+                <a:spcPct val="100000"/>
+              </a:lnSpc>
+              <a:spcBef>
+                <a:spcPts val="0"/>
+              </a:spcBef>
+              <a:spcAft>
+                <a:spcPts val="0"/>
+              </a:spcAft>
+              <a:buClr>
+                <a:schemeClr val="dk2"/>
+              </a:buClr>
+              <a:buSzPts val="1400"/>
+              <a:buFont typeface="Fira Code"/>
+              <a:buChar char="■"/>
+              <a:defRPr sz="1400" b="0" i="0" u="none" strike="noStrike" cap="none">
+                <a:solidFill>
+                  <a:schemeClr val="dk2"/>
+                </a:solidFill>
+                <a:latin typeface="Fira Code"/>
+                <a:ea typeface="Fira Code"/>
+                <a:cs typeface="Fira Code"/>
+                <a:sym typeface="Fira Code"/>
+              </a:defRPr>
+            </a:lvl9pPr>
+          </a:lstStyle>
+          <a:p>
+            <a:pPr marL="0" indent="0">
+              <a:buFont typeface="Fira Code"/>
+              <a:buNone/>
+            </a:pPr>
+            <a:r>
+              <a:rPr lang="fa-IR" sz="1100" dirty="0">
+                <a:solidFill>
+                  <a:schemeClr val="accent3"/>
+                </a:solidFill>
+              </a:rPr>
+              <a:t>10</a:t>
+            </a:r>
+            <a:endParaRPr lang="en" dirty="0">
+              <a:solidFill>
+                <a:schemeClr val="accent3"/>
+              </a:solidFill>
+            </a:endParaRPr>
+          </a:p>
+        </p:txBody>
+      </p:sp>
+    </p:spTree>
+    <p:extLst>
+      <p:ext uri="{BB962C8B-B14F-4D97-AF65-F5344CB8AC3E}">
+        <p14:creationId xmlns:p14="http://schemas.microsoft.com/office/powerpoint/2010/main" val="3644705103"/>
       </p:ext>
     </p:extLst>
   </p:cSld>
@@ -16069,7 +18919,7 @@
         </p:nvSpPr>
         <p:spPr>
           <a:xfrm>
-            <a:off x="802774" y="3896518"/>
+            <a:off x="1060184" y="3872318"/>
             <a:ext cx="8440378" cy="1020553"/>
           </a:xfrm>
           <a:prstGeom prst="rect">
@@ -17379,8 +20229,8 @@
           </a:p>
         </p:txBody>
       </p:sp>
-      <mc:AlternateContent xmlns:mc="http://schemas.openxmlformats.org/markup-compatibility/2006">
-        <mc:Choice xmlns:a14="http://schemas.microsoft.com/office/drawing/2010/main" Requires="a14">
+      <mc:AlternateContent xmlns:mc="http://schemas.openxmlformats.org/markup-compatibility/2006" xmlns:a14="http://schemas.microsoft.com/office/drawing/2010/main">
+        <mc:Choice Requires="a14">
           <p:sp>
             <p:nvSpPr>
               <p:cNvPr id="8" name="TextBox 7">
@@ -17612,7 +20462,7 @@
             </p:txBody>
           </p:sp>
         </mc:Choice>
-        <mc:Fallback>
+        <mc:Fallback xmlns="">
           <p:sp>
             <p:nvSpPr>
               <p:cNvPr id="8" name="TextBox 7">

--- a/slides/6.Function/Function.pptx
+++ b/slides/6.Function/Function.pptx
@@ -9924,7 +9924,7 @@
                   <a:schemeClr val="accent2"/>
                 </a:solidFill>
               </a:rPr>
-              <a:t>Home Work</a:t>
+              <a:t>Homework</a:t>
             </a:r>
           </a:p>
         </p:txBody>
@@ -11379,7 +11379,7 @@
                   <a:schemeClr val="accent2"/>
                 </a:solidFill>
               </a:rPr>
-              <a:t>Home Work</a:t>
+              <a:t>Homework</a:t>
             </a:r>
           </a:p>
         </p:txBody>

--- a/slides/6.Function/Function.pptx
+++ b/slides/6.Function/Function.pptx
@@ -9976,7 +9976,7 @@
             <a:r>
               <a:rPr lang="en-US" altLang="en-US" dirty="0">
                 <a:solidFill>
-                  <a:schemeClr val="accent1"/>
+                  <a:schemeClr val="accent2"/>
                 </a:solidFill>
                 <a:latin typeface="Fira Code"/>
                 <a:ea typeface="Fira Code"/>
@@ -9986,7 +9986,7 @@
             </a:r>
             <a:endParaRPr lang="fa-IR" altLang="en-US" dirty="0">
               <a:solidFill>
-                <a:schemeClr val="accent1"/>
+                <a:schemeClr val="accent2"/>
               </a:solidFill>
               <a:latin typeface="Fira Code"/>
               <a:ea typeface="Fira Code"/>
@@ -10012,7 +10012,7 @@
             </a:pPr>
             <a:endParaRPr lang="en-US" altLang="en-US" dirty="0">
               <a:solidFill>
-                <a:schemeClr val="accent1"/>
+                <a:schemeClr val="accent2"/>
               </a:solidFill>
               <a:latin typeface="Fira Code"/>
               <a:ea typeface="Fira Code"/>
@@ -10111,7 +10111,6 @@
               </a:solidFill>
               <a:latin typeface="Fira Code"/>
               <a:ea typeface="Fira Code"/>
-              <a:cs typeface="Fira Code"/>
             </a:endParaRPr>
           </a:p>
           <a:p>
@@ -10133,7 +10132,7 @@
             </a:pPr>
             <a:endParaRPr lang="en-US" altLang="en-US" dirty="0">
               <a:solidFill>
-                <a:schemeClr val="accent1"/>
+                <a:schemeClr val="accent2"/>
               </a:solidFill>
               <a:latin typeface="Fira Code"/>
               <a:ea typeface="Fira Code"/>
@@ -10160,7 +10159,7 @@
             <a:r>
               <a:rPr lang="en-US" altLang="en-US" dirty="0">
                 <a:solidFill>
-                  <a:schemeClr val="accent1"/>
+                  <a:schemeClr val="accent2"/>
                 </a:solidFill>
                 <a:latin typeface="Fira Code"/>
                 <a:ea typeface="Fira Code"/>
@@ -10170,7 +10169,7 @@
             </a:r>
             <a:endParaRPr lang="fa-IR" altLang="en-US" dirty="0">
               <a:solidFill>
-                <a:schemeClr val="accent1"/>
+                <a:schemeClr val="accent2"/>
               </a:solidFill>
               <a:latin typeface="Fira Code"/>
               <a:ea typeface="Fira Code"/>
@@ -11399,7 +11398,7 @@
         <p:spPr>
           <a:xfrm>
             <a:off x="1143250" y="1055985"/>
-            <a:ext cx="8000750" cy="3539430"/>
+            <a:ext cx="8000750" cy="1169551"/>
           </a:xfrm>
           <a:prstGeom prst="rect">
             <a:avLst/>
@@ -11412,409 +11411,95 @@
           </a:bodyPr>
           <a:lstStyle/>
           <a:p>
-            <a:pPr eaLnBrk="0" fontAlgn="base" hangingPunct="0">
-              <a:spcBef>
-                <a:spcPct val="0"/>
-              </a:spcBef>
-              <a:spcAft>
-                <a:spcPct val="0"/>
-              </a:spcAft>
-              <a:buClrTx/>
-            </a:pPr>
             <a:r>
-              <a:rPr lang="en-US" altLang="en-US" dirty="0">
-                <a:solidFill>
-                  <a:schemeClr val="accent1"/>
-                </a:solidFill>
-                <a:latin typeface="Fira Code"/>
-                <a:ea typeface="Fira Code"/>
-                <a:cs typeface="Fira Code"/>
+              <a:rPr lang="en-US" dirty="0">
+                <a:solidFill>
+                  <a:schemeClr val="accent3"/>
+                </a:solidFill>
+                <a:latin typeface="Fira Code"/>
+                <a:ea typeface="Fira Code"/>
+                <a:cs typeface="B Nazanin" panose="00000400000000000000" pitchFamily="2" charset="-78"/>
               </a:rPr>
-              <a:t>Write a C program that performs the following tasks:</a:t>
+              <a:t>Assignment: do the following: </a:t>
             </a:r>
           </a:p>
           <a:p>
-            <a:pPr eaLnBrk="0" fontAlgn="base" hangingPunct="0">
-              <a:spcBef>
-                <a:spcPct val="0"/>
-              </a:spcBef>
-              <a:spcAft>
-                <a:spcPct val="0"/>
-              </a:spcAft>
-              <a:buClrTx/>
+            <a:endParaRPr lang="en-US" dirty="0">
+              <a:solidFill>
+                <a:schemeClr val="accent3"/>
+              </a:solidFill>
+              <a:latin typeface="Fira Code"/>
+              <a:ea typeface="Fira Code"/>
+              <a:cs typeface="B Nazanin" panose="00000400000000000000" pitchFamily="2" charset="-78"/>
+            </a:endParaRPr>
+          </a:p>
+          <a:p>
+            <a:pPr marL="285750" indent="-285750">
+              <a:buFont typeface="Arial" panose="020B0604020202020204" pitchFamily="34" charset="0"/>
+              <a:buChar char="•"/>
             </a:pPr>
             <a:r>
-              <a:rPr lang="en-US" altLang="en-US" dirty="0">
-                <a:solidFill>
-                  <a:schemeClr val="accent1"/>
-                </a:solidFill>
-                <a:latin typeface="Fira Code"/>
-                <a:ea typeface="Fira Code"/>
-                <a:cs typeface="Fira Code"/>
+              <a:rPr lang="en-US" dirty="0">
+                <a:solidFill>
+                  <a:schemeClr val="accent2"/>
+                </a:solidFill>
+                <a:latin typeface="Fira Code"/>
+                <a:ea typeface="Fira Code"/>
+                <a:cs typeface="B Nazanin" panose="00000400000000000000" pitchFamily="2" charset="-78"/>
               </a:rPr>
-              <a:t>Takes a positive integer from the user.</a:t>
+              <a:t>  5.36 (Towers of Hanoi)</a:t>
             </a:r>
           </a:p>
           <a:p>
-            <a:pPr eaLnBrk="0" fontAlgn="base" hangingPunct="0">
-              <a:spcBef>
-                <a:spcPct val="0"/>
-              </a:spcBef>
-              <a:spcAft>
-                <a:spcPct val="0"/>
-              </a:spcAft>
-              <a:buClrTx/>
+            <a:pPr marL="285750" indent="-285750">
+              <a:buFont typeface="Arial" panose="020B0604020202020204" pitchFamily="34" charset="0"/>
+              <a:buChar char="•"/>
             </a:pPr>
+            <a:endParaRPr lang="en-US" dirty="0">
+              <a:solidFill>
+                <a:schemeClr val="accent2"/>
+              </a:solidFill>
+              <a:latin typeface="Fira Code"/>
+              <a:ea typeface="Fira Code"/>
+              <a:cs typeface="B Nazanin" panose="00000400000000000000" pitchFamily="2" charset="-78"/>
+            </a:endParaRPr>
+          </a:p>
+          <a:p>
             <a:r>
-              <a:rPr lang="en-US" altLang="en-US" dirty="0">
-                <a:solidFill>
-                  <a:schemeClr val="accent1"/>
-                </a:solidFill>
-                <a:latin typeface="Fira Code"/>
-                <a:ea typeface="Fira Code"/>
-                <a:cs typeface="Fira Code"/>
+              <a:rPr lang="en-US" dirty="0">
+                <a:solidFill>
+                  <a:schemeClr val="accent6"/>
+                </a:solidFill>
+                <a:latin typeface="Fira Code"/>
+                <a:ea typeface="Fira Code"/>
+                <a:cs typeface="B Nazanin" panose="00000400000000000000" pitchFamily="2" charset="-78"/>
               </a:rPr>
-              <a:t>Removes all digits that are not prime digits </a:t>
+              <a:t>from</a:t>
             </a:r>
             <a:r>
               <a:rPr lang="en-US" dirty="0">
                 <a:solidFill>
-                  <a:schemeClr val="accent1"/>
-                </a:solidFill>
-                <a:latin typeface="Fira Code"/>
-                <a:ea typeface="Fira Code"/>
-                <a:cs typeface="Fira Code"/>
+                  <a:schemeClr val="accent2">
+                    <a:lumMod val="75000"/>
+                  </a:schemeClr>
+                </a:solidFill>
+                <a:latin typeface="Fira Code"/>
+                <a:ea typeface="Fira Code"/>
+                <a:cs typeface="B Nazanin" panose="00000400000000000000" pitchFamily="2" charset="-78"/>
               </a:rPr>
-              <a:t>(i.e., not in {2, 3, 5, 7})</a:t>
-            </a:r>
-            <a:endParaRPr lang="fa-IR" altLang="en-US" dirty="0">
-              <a:solidFill>
-                <a:schemeClr val="accent1"/>
-              </a:solidFill>
-              <a:latin typeface="Fira Code"/>
-              <a:ea typeface="Fira Code"/>
-            </a:endParaRPr>
-          </a:p>
-          <a:p>
-            <a:pPr eaLnBrk="0" fontAlgn="base" hangingPunct="0">
-              <a:spcBef>
-                <a:spcPct val="0"/>
-              </a:spcBef>
-              <a:spcAft>
-                <a:spcPct val="0"/>
-              </a:spcAft>
-              <a:buClrTx/>
-            </a:pPr>
-            <a:endParaRPr lang="fa-IR" altLang="en-US" dirty="0">
-              <a:solidFill>
-                <a:schemeClr val="accent1"/>
-              </a:solidFill>
-              <a:latin typeface="Fira Code"/>
-              <a:ea typeface="Fira Code"/>
-              <a:cs typeface="Fira Code"/>
-            </a:endParaRPr>
-          </a:p>
-          <a:p>
-            <a:pPr eaLnBrk="0" fontAlgn="base" hangingPunct="0">
-              <a:spcBef>
-                <a:spcPct val="0"/>
-              </a:spcBef>
-              <a:spcAft>
-                <a:spcPct val="0"/>
-              </a:spcAft>
-              <a:buClrTx/>
-            </a:pPr>
-            <a:r>
-              <a:rPr lang="en-US" altLang="en-US" dirty="0">
-                <a:solidFill>
-                  <a:schemeClr val="accent1"/>
-                </a:solidFill>
-                <a:latin typeface="Fira Code"/>
-                <a:ea typeface="Fira Code"/>
-                <a:cs typeface="Fira Code"/>
-              </a:rPr>
-              <a:t>Creates a new number composed only of the prime digits in the original order.</a:t>
-            </a:r>
-          </a:p>
-          <a:p>
-            <a:pPr eaLnBrk="0" fontAlgn="base" hangingPunct="0">
-              <a:spcBef>
-                <a:spcPct val="0"/>
-              </a:spcBef>
-              <a:spcAft>
-                <a:spcPct val="0"/>
-              </a:spcAft>
-              <a:buClrTx/>
-            </a:pPr>
-            <a:r>
-              <a:rPr lang="en-US" altLang="en-US" dirty="0">
-                <a:solidFill>
-                  <a:schemeClr val="accent1"/>
-                </a:solidFill>
-                <a:latin typeface="Fira Code"/>
-                <a:ea typeface="Fira Code"/>
-                <a:cs typeface="Fira Code"/>
-              </a:rPr>
-              <a:t>Recursively calculates the sum of the remaining digits.</a:t>
-            </a:r>
-            <a:endParaRPr lang="fa-IR" altLang="en-US" dirty="0">
-              <a:solidFill>
-                <a:schemeClr val="accent1"/>
-              </a:solidFill>
-              <a:latin typeface="Fira Code"/>
-              <a:ea typeface="Fira Code"/>
-              <a:cs typeface="Fira Code"/>
-            </a:endParaRPr>
-          </a:p>
-          <a:p>
-            <a:pPr eaLnBrk="0" fontAlgn="base" hangingPunct="0">
-              <a:spcBef>
-                <a:spcPct val="0"/>
-              </a:spcBef>
-              <a:spcAft>
-                <a:spcPct val="0"/>
-              </a:spcAft>
-              <a:buClrTx/>
-            </a:pPr>
-            <a:endParaRPr lang="en-US" altLang="en-US" dirty="0">
-              <a:solidFill>
-                <a:schemeClr val="accent1"/>
-              </a:solidFill>
-              <a:latin typeface="Fira Code"/>
-              <a:ea typeface="Fira Code"/>
-              <a:cs typeface="Fira Code"/>
-            </a:endParaRPr>
-          </a:p>
-          <a:p>
-            <a:pPr eaLnBrk="0" fontAlgn="base" hangingPunct="0">
-              <a:spcBef>
-                <a:spcPct val="0"/>
-              </a:spcBef>
-              <a:spcAft>
-                <a:spcPct val="0"/>
-              </a:spcAft>
-              <a:buClrTx/>
-            </a:pPr>
-            <a:r>
-              <a:rPr lang="en-US" altLang="en-US" dirty="0">
-                <a:solidFill>
-                  <a:schemeClr val="accent1"/>
-                </a:solidFill>
-                <a:latin typeface="Fira Code"/>
-                <a:ea typeface="Fira Code"/>
-                <a:cs typeface="Fira Code"/>
-              </a:rPr>
-              <a:t>You must implement the following functions:</a:t>
-            </a:r>
-            <a:endParaRPr lang="fa-IR" altLang="en-US" dirty="0">
-              <a:solidFill>
-                <a:schemeClr val="accent1"/>
-              </a:solidFill>
-              <a:latin typeface="Fira Code"/>
-              <a:ea typeface="Fira Code"/>
-              <a:cs typeface="Fira Code"/>
-            </a:endParaRPr>
-          </a:p>
-          <a:p>
-            <a:pPr eaLnBrk="0" fontAlgn="base" hangingPunct="0">
-              <a:spcBef>
-                <a:spcPct val="0"/>
-              </a:spcBef>
-              <a:spcAft>
-                <a:spcPct val="0"/>
-              </a:spcAft>
-              <a:buClrTx/>
-            </a:pPr>
-            <a:endParaRPr lang="en-US" altLang="en-US" dirty="0">
-              <a:solidFill>
-                <a:schemeClr val="accent1"/>
-              </a:solidFill>
-              <a:latin typeface="Fira Code"/>
-              <a:ea typeface="Fira Code"/>
-              <a:cs typeface="Fira Code"/>
-            </a:endParaRPr>
-          </a:p>
-          <a:p>
-            <a:pPr eaLnBrk="0" fontAlgn="base" hangingPunct="0">
-              <a:spcBef>
-                <a:spcPct val="0"/>
-              </a:spcBef>
-              <a:spcAft>
-                <a:spcPct val="0"/>
-              </a:spcAft>
-              <a:buClrTx/>
-            </a:pPr>
-            <a:r>
-              <a:rPr lang="en-US" altLang="en-US" dirty="0">
-                <a:solidFill>
-                  <a:schemeClr val="accent1"/>
-                </a:solidFill>
-                <a:latin typeface="Fira Code"/>
-                <a:ea typeface="Fira Code"/>
-                <a:cs typeface="Fira Code"/>
-              </a:rPr>
-              <a:t>int </a:t>
+              <a:t> </a:t>
             </a:r>
             <a:r>
-              <a:rPr lang="en-US" altLang="en-US" b="1" dirty="0" err="1">
-                <a:solidFill>
-                  <a:schemeClr val="accent1"/>
-                </a:solidFill>
-                <a:latin typeface="Fira Code"/>
-                <a:ea typeface="Fira Code"/>
-                <a:cs typeface="Fira Code"/>
+              <a:rPr lang="en-US" dirty="0">
+                <a:solidFill>
+                  <a:schemeClr val="accent3"/>
+                </a:solidFill>
+                <a:latin typeface="Fira Code"/>
+                <a:ea typeface="Fira Code"/>
+                <a:cs typeface="B Nazanin" panose="00000400000000000000" pitchFamily="2" charset="-78"/>
               </a:rPr>
-              <a:t>isPrimeDigit</a:t>
+              <a:t>C How to Program, 9th Edition (Deitel)</a:t>
             </a:r>
-            <a:r>
-              <a:rPr lang="en-US" altLang="en-US" b="1" dirty="0">
-                <a:solidFill>
-                  <a:schemeClr val="accent1"/>
-                </a:solidFill>
-                <a:latin typeface="Fira Code"/>
-                <a:ea typeface="Fira Code"/>
-                <a:cs typeface="Fira Code"/>
-              </a:rPr>
-              <a:t>(int d); </a:t>
-            </a:r>
-            <a:r>
-              <a:rPr lang="en-US" altLang="en-US" dirty="0">
-                <a:solidFill>
-                  <a:schemeClr val="accent1"/>
-                </a:solidFill>
-                <a:latin typeface="Fira Code"/>
-                <a:ea typeface="Fira Code"/>
-                <a:cs typeface="Fira Code"/>
-              </a:rPr>
-              <a:t>– returns 1 if d is a prime digit, otherwise 0.</a:t>
-            </a:r>
-          </a:p>
-          <a:p>
-            <a:pPr eaLnBrk="0" fontAlgn="base" hangingPunct="0">
-              <a:spcBef>
-                <a:spcPct val="0"/>
-              </a:spcBef>
-              <a:spcAft>
-                <a:spcPct val="0"/>
-              </a:spcAft>
-              <a:buClrTx/>
-            </a:pPr>
-            <a:r>
-              <a:rPr lang="en-US" altLang="en-US" dirty="0">
-                <a:solidFill>
-                  <a:schemeClr val="accent1"/>
-                </a:solidFill>
-                <a:latin typeface="Fira Code"/>
-                <a:ea typeface="Fira Code"/>
-                <a:cs typeface="Fira Code"/>
-              </a:rPr>
-              <a:t>int </a:t>
-            </a:r>
-            <a:r>
-              <a:rPr lang="en-US" altLang="en-US" b="1" dirty="0" err="1">
-                <a:solidFill>
-                  <a:schemeClr val="accent1"/>
-                </a:solidFill>
-                <a:latin typeface="Fira Code"/>
-                <a:ea typeface="Fira Code"/>
-                <a:cs typeface="Fira Code"/>
-              </a:rPr>
-              <a:t>extractPrimeDigits</a:t>
-            </a:r>
-            <a:r>
-              <a:rPr lang="en-US" altLang="en-US" b="1" dirty="0">
-                <a:solidFill>
-                  <a:schemeClr val="accent1"/>
-                </a:solidFill>
-                <a:latin typeface="Fira Code"/>
-                <a:ea typeface="Fira Code"/>
-                <a:cs typeface="Fira Code"/>
-              </a:rPr>
-              <a:t>(int n); </a:t>
-            </a:r>
-            <a:r>
-              <a:rPr lang="en-US" altLang="en-US" dirty="0">
-                <a:solidFill>
-                  <a:schemeClr val="accent1"/>
-                </a:solidFill>
-                <a:latin typeface="Fira Code"/>
-                <a:ea typeface="Fira Code"/>
-                <a:cs typeface="Fira Code"/>
-              </a:rPr>
-              <a:t>– returns the new number made only of prime digits, in correct order.</a:t>
-            </a:r>
-          </a:p>
-          <a:p>
-            <a:pPr eaLnBrk="0" fontAlgn="base" hangingPunct="0">
-              <a:spcBef>
-                <a:spcPct val="0"/>
-              </a:spcBef>
-              <a:spcAft>
-                <a:spcPct val="0"/>
-              </a:spcAft>
-              <a:buClrTx/>
-            </a:pPr>
-            <a:r>
-              <a:rPr lang="en-US" altLang="en-US" dirty="0">
-                <a:solidFill>
-                  <a:schemeClr val="accent1"/>
-                </a:solidFill>
-                <a:latin typeface="Fira Code"/>
-                <a:ea typeface="Fira Code"/>
-                <a:cs typeface="Fira Code"/>
-              </a:rPr>
-              <a:t>int </a:t>
-            </a:r>
-            <a:r>
-              <a:rPr lang="en-US" altLang="en-US" b="1" dirty="0" err="1">
-                <a:solidFill>
-                  <a:schemeClr val="accent1"/>
-                </a:solidFill>
-                <a:latin typeface="Fira Code"/>
-                <a:ea typeface="Fira Code"/>
-                <a:cs typeface="Fira Code"/>
-              </a:rPr>
-              <a:t>sumDigitsRecursive</a:t>
-            </a:r>
-            <a:r>
-              <a:rPr lang="en-US" altLang="en-US" b="1" dirty="0">
-                <a:solidFill>
-                  <a:schemeClr val="accent1"/>
-                </a:solidFill>
-                <a:latin typeface="Fira Code"/>
-                <a:ea typeface="Fira Code"/>
-                <a:cs typeface="Fira Code"/>
-              </a:rPr>
-              <a:t>(int n); </a:t>
-            </a:r>
-            <a:r>
-              <a:rPr lang="en-US" altLang="en-US" dirty="0">
-                <a:solidFill>
-                  <a:schemeClr val="accent1"/>
-                </a:solidFill>
-                <a:latin typeface="Fira Code"/>
-                <a:ea typeface="Fira Code"/>
-                <a:cs typeface="Fira Code"/>
-              </a:rPr>
-              <a:t>– returns the sum of digits of a number recursively.</a:t>
-            </a:r>
-          </a:p>
-          <a:p>
-            <a:pPr lvl="0" eaLnBrk="0" fontAlgn="base" hangingPunct="0">
-              <a:spcBef>
-                <a:spcPct val="0"/>
-              </a:spcBef>
-              <a:spcAft>
-                <a:spcPct val="0"/>
-              </a:spcAft>
-              <a:buClrTx/>
-            </a:pPr>
-            <a:endParaRPr lang="en-US" altLang="en-US" dirty="0">
-              <a:solidFill>
-                <a:schemeClr val="accent1"/>
-              </a:solidFill>
-              <a:latin typeface="Arial" panose="020B0604020202020204" pitchFamily="34" charset="0"/>
-            </a:endParaRPr>
           </a:p>
         </p:txBody>
       </p:sp>
